--- a/CTA投研框架.pptx
+++ b/CTA投研框架.pptx
@@ -2106,7 +2106,7 @@
           <a:p>
             <a:fld id="{5BCAD085-E8A6-8845-BD4E-CB4CCA059FC4}" type="datetimeFigureOut">
               <a:rPr lang="en-US" smtClean="0"/>
-              <a:t>6/16/2026</a:t>
+              <a:t>6/23/2026</a:t>
             </a:fld>
             <a:endParaRPr lang="en-US"/>
           </a:p>
@@ -2274,7 +2274,7 @@
           <a:p>
             <a:fld id="{5BCAD085-E8A6-8845-BD4E-CB4CCA059FC4}" type="datetimeFigureOut">
               <a:rPr lang="en-US" smtClean="0"/>
-              <a:t>6/16/2026</a:t>
+              <a:t>6/23/2026</a:t>
             </a:fld>
             <a:endParaRPr lang="en-US"/>
           </a:p>
@@ -2452,7 +2452,7 @@
           <a:p>
             <a:fld id="{5BCAD085-E8A6-8845-BD4E-CB4CCA059FC4}" type="datetimeFigureOut">
               <a:rPr lang="en-US" smtClean="0"/>
-              <a:t>6/16/2026</a:t>
+              <a:t>6/23/2026</a:t>
             </a:fld>
             <a:endParaRPr lang="en-US"/>
           </a:p>
@@ -2620,7 +2620,7 @@
           <a:p>
             <a:fld id="{5BCAD085-E8A6-8845-BD4E-CB4CCA059FC4}" type="datetimeFigureOut">
               <a:rPr lang="en-US" smtClean="0"/>
-              <a:t>6/16/2026</a:t>
+              <a:t>6/23/2026</a:t>
             </a:fld>
             <a:endParaRPr lang="en-US"/>
           </a:p>
@@ -2865,7 +2865,7 @@
           <a:p>
             <a:fld id="{5BCAD085-E8A6-8845-BD4E-CB4CCA059FC4}" type="datetimeFigureOut">
               <a:rPr lang="en-US" smtClean="0"/>
-              <a:t>6/16/2026</a:t>
+              <a:t>6/23/2026</a:t>
             </a:fld>
             <a:endParaRPr lang="en-US"/>
           </a:p>
@@ -3150,7 +3150,7 @@
           <a:p>
             <a:fld id="{5BCAD085-E8A6-8845-BD4E-CB4CCA059FC4}" type="datetimeFigureOut">
               <a:rPr lang="en-US" smtClean="0"/>
-              <a:t>6/16/2026</a:t>
+              <a:t>6/23/2026</a:t>
             </a:fld>
             <a:endParaRPr lang="en-US"/>
           </a:p>
@@ -3569,7 +3569,7 @@
           <a:p>
             <a:fld id="{5BCAD085-E8A6-8845-BD4E-CB4CCA059FC4}" type="datetimeFigureOut">
               <a:rPr lang="en-US" smtClean="0"/>
-              <a:t>6/16/2026</a:t>
+              <a:t>6/23/2026</a:t>
             </a:fld>
             <a:endParaRPr lang="en-US"/>
           </a:p>
@@ -3686,7 +3686,7 @@
           <a:p>
             <a:fld id="{5BCAD085-E8A6-8845-BD4E-CB4CCA059FC4}" type="datetimeFigureOut">
               <a:rPr lang="en-US" smtClean="0"/>
-              <a:t>6/16/2026</a:t>
+              <a:t>6/23/2026</a:t>
             </a:fld>
             <a:endParaRPr lang="en-US"/>
           </a:p>
@@ -3781,7 +3781,7 @@
           <a:p>
             <a:fld id="{5BCAD085-E8A6-8845-BD4E-CB4CCA059FC4}" type="datetimeFigureOut">
               <a:rPr lang="en-US" smtClean="0"/>
-              <a:t>6/16/2026</a:t>
+              <a:t>6/23/2026</a:t>
             </a:fld>
             <a:endParaRPr lang="en-US"/>
           </a:p>
@@ -4056,7 +4056,7 @@
           <a:p>
             <a:fld id="{5BCAD085-E8A6-8845-BD4E-CB4CCA059FC4}" type="datetimeFigureOut">
               <a:rPr lang="en-US" smtClean="0"/>
-              <a:t>6/16/2026</a:t>
+              <a:t>6/23/2026</a:t>
             </a:fld>
             <a:endParaRPr lang="en-US"/>
           </a:p>
@@ -4308,7 +4308,7 @@
           <a:p>
             <a:fld id="{5BCAD085-E8A6-8845-BD4E-CB4CCA059FC4}" type="datetimeFigureOut">
               <a:rPr lang="en-US" smtClean="0"/>
-              <a:t>6/16/2026</a:t>
+              <a:t>6/23/2026</a:t>
             </a:fld>
             <a:endParaRPr lang="en-US"/>
           </a:p>
@@ -4519,7 +4519,7 @@
           <a:p>
             <a:fld id="{5BCAD085-E8A6-8845-BD4E-CB4CCA059FC4}" type="datetimeFigureOut">
               <a:rPr lang="en-US" smtClean="0"/>
-              <a:t>6/16/2026</a:t>
+              <a:t>6/23/2026</a:t>
             </a:fld>
             <a:endParaRPr lang="en-US"/>
           </a:p>
@@ -5857,7 +5857,7 @@
         <p:spPr>
           <a:xfrm>
             <a:off x="886968" y="2459736"/>
-            <a:ext cx="10607040" cy="1985159"/>
+            <a:ext cx="10607040" cy="3241913"/>
           </a:xfrm>
           <a:prstGeom prst="rect">
             <a:avLst/>
@@ -5887,7 +5887,7 @@
                   <a:srgbClr val="475569"/>
                 </a:solidFill>
               </a:rPr>
-              <a:t>框架目标：打通数据、因子、组合、风控、执行的全链路闭环</a:t>
+              <a:t>数据层：先保证连续性、准确性、可追溯性，再追求覆盖广度</a:t>
             </a:r>
             <a:endParaRPr sz="1300" dirty="0">
               <a:solidFill>
@@ -5907,13 +5907,31 @@
                 <a:latin typeface="Microsoft YaHei"/>
               </a:defRPr>
             </a:pPr>
+            <a:endParaRPr lang="en-US" sz="1300" dirty="0">
+              <a:solidFill>
+                <a:srgbClr val="475569"/>
+              </a:solidFill>
+            </a:endParaRPr>
+          </a:p>
+          <a:p>
+            <a:pPr>
+              <a:spcAft>
+                <a:spcPts val="400"/>
+              </a:spcAft>
+              <a:defRPr sz="1200" b="0">
+                <a:solidFill>
+                  <a:srgbClr val="475569"/>
+                </a:solidFill>
+                <a:latin typeface="Microsoft YaHei"/>
+              </a:defRPr>
+            </a:pPr>
             <a:r>
               <a:rPr sz="1300" dirty="0" err="1">
                 <a:solidFill>
                   <a:srgbClr val="475569"/>
                 </a:solidFill>
               </a:rPr>
-              <a:t>数据层：先保证连续性、准确性、可追溯性，再追求覆盖广度</a:t>
+              <a:t>因子层：以经济逻辑为先、统计显著为证，避免过拟合与样本偏见</a:t>
             </a:r>
             <a:endParaRPr sz="1300" dirty="0">
               <a:solidFill>
@@ -5933,13 +5951,31 @@
                 <a:latin typeface="Microsoft YaHei"/>
               </a:defRPr>
             </a:pPr>
+            <a:endParaRPr lang="en-US" sz="1300" dirty="0">
+              <a:solidFill>
+                <a:srgbClr val="475569"/>
+              </a:solidFill>
+            </a:endParaRPr>
+          </a:p>
+          <a:p>
+            <a:pPr>
+              <a:spcAft>
+                <a:spcPts val="400"/>
+              </a:spcAft>
+              <a:defRPr sz="1200" b="0">
+                <a:solidFill>
+                  <a:srgbClr val="475569"/>
+                </a:solidFill>
+                <a:latin typeface="Microsoft YaHei"/>
+              </a:defRPr>
+            </a:pPr>
             <a:r>
               <a:rPr sz="1300" dirty="0" err="1">
                 <a:solidFill>
                   <a:srgbClr val="475569"/>
                 </a:solidFill>
               </a:rPr>
-              <a:t>因子层：以经济逻辑为先、统计显著为证，避免过拟合与样本偏见</a:t>
+              <a:t>评估层：同时看收益、回撤、容量、换手和交易成本的综合表现</a:t>
             </a:r>
             <a:endParaRPr sz="1300" dirty="0">
               <a:solidFill>
@@ -5959,13 +5995,31 @@
                 <a:latin typeface="Microsoft YaHei"/>
               </a:defRPr>
             </a:pPr>
+            <a:endParaRPr lang="en-US" sz="1300" dirty="0">
+              <a:solidFill>
+                <a:srgbClr val="475569"/>
+              </a:solidFill>
+            </a:endParaRPr>
+          </a:p>
+          <a:p>
+            <a:pPr>
+              <a:spcAft>
+                <a:spcPts val="400"/>
+              </a:spcAft>
+              <a:defRPr sz="1200" b="0">
+                <a:solidFill>
+                  <a:srgbClr val="475569"/>
+                </a:solidFill>
+                <a:latin typeface="Microsoft YaHei"/>
+              </a:defRPr>
+            </a:pPr>
             <a:r>
               <a:rPr sz="1300" dirty="0" err="1">
                 <a:solidFill>
                   <a:srgbClr val="475569"/>
                 </a:solidFill>
               </a:rPr>
-              <a:t>评估层：同时看收益、回撤、容量、换手和交易成本的综合表现</a:t>
+              <a:t>组合层：通过低相关信号叠加提升稳定性，而非单因子收益最大化</a:t>
             </a:r>
             <a:endParaRPr sz="1300" dirty="0">
               <a:solidFill>
@@ -5985,13 +6039,31 @@
                 <a:latin typeface="Microsoft YaHei"/>
               </a:defRPr>
             </a:pPr>
+            <a:endParaRPr lang="en-US" sz="1300" dirty="0">
+              <a:solidFill>
+                <a:srgbClr val="475569"/>
+              </a:solidFill>
+            </a:endParaRPr>
+          </a:p>
+          <a:p>
+            <a:pPr>
+              <a:spcAft>
+                <a:spcPts val="400"/>
+              </a:spcAft>
+              <a:defRPr sz="1200" b="0">
+                <a:solidFill>
+                  <a:srgbClr val="475569"/>
+                </a:solidFill>
+                <a:latin typeface="Microsoft YaHei"/>
+              </a:defRPr>
+            </a:pPr>
             <a:r>
               <a:rPr sz="1300" dirty="0" err="1">
                 <a:solidFill>
                   <a:srgbClr val="475569"/>
                 </a:solidFill>
               </a:rPr>
-              <a:t>组合层：通过低相关信号叠加提升稳定性，而非单因子收益最大化</a:t>
+              <a:t>风控层：用硬约束控制尾部风险，用动态仓位管理平滑净值波动</a:t>
             </a:r>
             <a:endParaRPr sz="1300" dirty="0">
               <a:solidFill>
@@ -6011,13 +6083,31 @@
                 <a:latin typeface="Microsoft YaHei"/>
               </a:defRPr>
             </a:pPr>
+            <a:endParaRPr lang="en-US" sz="1300" dirty="0">
+              <a:solidFill>
+                <a:srgbClr val="475569"/>
+              </a:solidFill>
+            </a:endParaRPr>
+          </a:p>
+          <a:p>
+            <a:pPr>
+              <a:spcAft>
+                <a:spcPts val="400"/>
+              </a:spcAft>
+              <a:defRPr sz="1200" b="0">
+                <a:solidFill>
+                  <a:srgbClr val="475569"/>
+                </a:solidFill>
+                <a:latin typeface="Microsoft YaHei"/>
+              </a:defRPr>
+            </a:pPr>
             <a:r>
               <a:rPr sz="1300" dirty="0" err="1">
                 <a:solidFill>
                   <a:srgbClr val="475569"/>
                 </a:solidFill>
               </a:rPr>
-              <a:t>风控层：用硬约束控制尾部风险，用动态仓位管理平滑净值波动</a:t>
+              <a:t>执行层：以可成交性为核心，持续优化冲击成本与滑点控制</a:t>
             </a:r>
             <a:endParaRPr sz="1300" dirty="0">
               <a:solidFill>
@@ -6037,15 +6127,7 @@
                 <a:latin typeface="Microsoft YaHei"/>
               </a:defRPr>
             </a:pPr>
-            <a:r>
-              <a:rPr sz="1300" dirty="0" err="1">
-                <a:solidFill>
-                  <a:srgbClr val="475569"/>
-                </a:solidFill>
-              </a:rPr>
-              <a:t>执行层：以可成交性为核心，持续优化冲击成本与滑点控制</a:t>
-            </a:r>
-            <a:endParaRPr sz="1300" dirty="0">
+            <a:endParaRPr lang="en-US" sz="1300" dirty="0">
               <a:solidFill>
                 <a:srgbClr val="475569"/>
               </a:solidFill>

--- a/CTA投研框架.pptx
+++ b/CTA投研框架.pptx
@@ -2106,7 +2106,7 @@
           <a:p>
             <a:fld id="{5BCAD085-E8A6-8845-BD4E-CB4CCA059FC4}" type="datetimeFigureOut">
               <a:rPr lang="en-US" smtClean="0"/>
-              <a:t>6/23/2026</a:t>
+              <a:t>6/24/2026</a:t>
             </a:fld>
             <a:endParaRPr lang="en-US"/>
           </a:p>
@@ -2274,7 +2274,7 @@
           <a:p>
             <a:fld id="{5BCAD085-E8A6-8845-BD4E-CB4CCA059FC4}" type="datetimeFigureOut">
               <a:rPr lang="en-US" smtClean="0"/>
-              <a:t>6/23/2026</a:t>
+              <a:t>6/24/2026</a:t>
             </a:fld>
             <a:endParaRPr lang="en-US"/>
           </a:p>
@@ -2452,7 +2452,7 @@
           <a:p>
             <a:fld id="{5BCAD085-E8A6-8845-BD4E-CB4CCA059FC4}" type="datetimeFigureOut">
               <a:rPr lang="en-US" smtClean="0"/>
-              <a:t>6/23/2026</a:t>
+              <a:t>6/24/2026</a:t>
             </a:fld>
             <a:endParaRPr lang="en-US"/>
           </a:p>
@@ -2620,7 +2620,7 @@
           <a:p>
             <a:fld id="{5BCAD085-E8A6-8845-BD4E-CB4CCA059FC4}" type="datetimeFigureOut">
               <a:rPr lang="en-US" smtClean="0"/>
-              <a:t>6/23/2026</a:t>
+              <a:t>6/24/2026</a:t>
             </a:fld>
             <a:endParaRPr lang="en-US"/>
           </a:p>
@@ -2865,7 +2865,7 @@
           <a:p>
             <a:fld id="{5BCAD085-E8A6-8845-BD4E-CB4CCA059FC4}" type="datetimeFigureOut">
               <a:rPr lang="en-US" smtClean="0"/>
-              <a:t>6/23/2026</a:t>
+              <a:t>6/24/2026</a:t>
             </a:fld>
             <a:endParaRPr lang="en-US"/>
           </a:p>
@@ -3150,7 +3150,7 @@
           <a:p>
             <a:fld id="{5BCAD085-E8A6-8845-BD4E-CB4CCA059FC4}" type="datetimeFigureOut">
               <a:rPr lang="en-US" smtClean="0"/>
-              <a:t>6/23/2026</a:t>
+              <a:t>6/24/2026</a:t>
             </a:fld>
             <a:endParaRPr lang="en-US"/>
           </a:p>
@@ -3569,7 +3569,7 @@
           <a:p>
             <a:fld id="{5BCAD085-E8A6-8845-BD4E-CB4CCA059FC4}" type="datetimeFigureOut">
               <a:rPr lang="en-US" smtClean="0"/>
-              <a:t>6/23/2026</a:t>
+              <a:t>6/24/2026</a:t>
             </a:fld>
             <a:endParaRPr lang="en-US"/>
           </a:p>
@@ -3686,7 +3686,7 @@
           <a:p>
             <a:fld id="{5BCAD085-E8A6-8845-BD4E-CB4CCA059FC4}" type="datetimeFigureOut">
               <a:rPr lang="en-US" smtClean="0"/>
-              <a:t>6/23/2026</a:t>
+              <a:t>6/24/2026</a:t>
             </a:fld>
             <a:endParaRPr lang="en-US"/>
           </a:p>
@@ -3781,7 +3781,7 @@
           <a:p>
             <a:fld id="{5BCAD085-E8A6-8845-BD4E-CB4CCA059FC4}" type="datetimeFigureOut">
               <a:rPr lang="en-US" smtClean="0"/>
-              <a:t>6/23/2026</a:t>
+              <a:t>6/24/2026</a:t>
             </a:fld>
             <a:endParaRPr lang="en-US"/>
           </a:p>
@@ -4056,7 +4056,7 @@
           <a:p>
             <a:fld id="{5BCAD085-E8A6-8845-BD4E-CB4CCA059FC4}" type="datetimeFigureOut">
               <a:rPr lang="en-US" smtClean="0"/>
-              <a:t>6/23/2026</a:t>
+              <a:t>6/24/2026</a:t>
             </a:fld>
             <a:endParaRPr lang="en-US"/>
           </a:p>
@@ -4308,7 +4308,7 @@
           <a:p>
             <a:fld id="{5BCAD085-E8A6-8845-BD4E-CB4CCA059FC4}" type="datetimeFigureOut">
               <a:rPr lang="en-US" smtClean="0"/>
-              <a:t>6/23/2026</a:t>
+              <a:t>6/24/2026</a:t>
             </a:fld>
             <a:endParaRPr lang="en-US"/>
           </a:p>
@@ -4519,7 +4519,7 @@
           <a:p>
             <a:fld id="{5BCAD085-E8A6-8845-BD4E-CB4CCA059FC4}" type="datetimeFigureOut">
               <a:rPr lang="en-US" smtClean="0"/>
-              <a:t>6/23/2026</a:t>
+              <a:t>6/24/2026</a:t>
             </a:fld>
             <a:endParaRPr lang="en-US"/>
           </a:p>
@@ -6944,7 +6944,7 @@
         <p:spPr>
           <a:xfrm>
             <a:off x="886968" y="4837176"/>
-            <a:ext cx="10607040" cy="459100"/>
+            <a:ext cx="10607040" cy="489878"/>
           </a:xfrm>
           <a:prstGeom prst="rect">
             <a:avLst/>
@@ -6969,32 +6969,38 @@
               </a:defRPr>
             </a:pPr>
             <a:r>
-              <a:rPr lang="zh-CN" altLang="en-US" dirty="0">
+              <a:rPr lang="zh-CN" altLang="en-US" sz="1300" dirty="0">
                 <a:latin typeface="微软雅黑" panose="020B0503020204020204" pitchFamily="34" charset="-122"/>
                 <a:ea typeface="微软雅黑" panose="020B0503020204020204" pitchFamily="34" charset="-122"/>
               </a:rPr>
               <a:t>数据</a:t>
             </a:r>
             <a:r>
-              <a:rPr dirty="0">
+              <a:rPr sz="1300" dirty="0">
                 <a:latin typeface="微软雅黑" panose="020B0503020204020204" pitchFamily="34" charset="-122"/>
                 <a:ea typeface="微软雅黑" panose="020B0503020204020204" pitchFamily="34" charset="-122"/>
               </a:rPr>
               <a:t>、</a:t>
             </a:r>
             <a:r>
-              <a:rPr lang="zh-CN" altLang="en-US" dirty="0">
+              <a:rPr lang="zh-CN" altLang="en-US" sz="1300" dirty="0">
                 <a:latin typeface="微软雅黑" panose="020B0503020204020204" pitchFamily="34" charset="-122"/>
                 <a:ea typeface="微软雅黑" panose="020B0503020204020204" pitchFamily="34" charset="-122"/>
               </a:rPr>
               <a:t>因子、</a:t>
             </a:r>
             <a:r>
-              <a:rPr dirty="0" err="1"/>
+              <a:rPr sz="1300" dirty="0" err="1">
+                <a:latin typeface="微软雅黑" panose="020B0503020204020204" pitchFamily="34" charset="-122"/>
+                <a:ea typeface="微软雅黑" panose="020B0503020204020204" pitchFamily="34" charset="-122"/>
+              </a:rPr>
               <a:t>风控与执行需要协同，核心壁垒在于全链路联动</a:t>
             </a:r>
             <a:r>
-              <a:rPr dirty="0"/>
+              <a:rPr sz="1300" dirty="0">
+                <a:latin typeface="微软雅黑" panose="020B0503020204020204" pitchFamily="34" charset="-122"/>
+                <a:ea typeface="微软雅黑" panose="020B0503020204020204" pitchFamily="34" charset="-122"/>
+              </a:rPr>
               <a:t>。</a:t>
             </a:r>
           </a:p>
@@ -7011,11 +7017,17 @@
               </a:defRPr>
             </a:pPr>
             <a:r>
-              <a:rPr dirty="0" err="1"/>
+              <a:rPr sz="1300" dirty="0" err="1">
+                <a:latin typeface="微软雅黑" panose="020B0503020204020204" pitchFamily="34" charset="-122"/>
+                <a:ea typeface="微软雅黑" panose="020B0503020204020204" pitchFamily="34" charset="-122"/>
+              </a:rPr>
               <a:t>任何单环节失真，最终都会表现为回撤放大、容量受限或执行偏差</a:t>
             </a:r>
             <a:r>
-              <a:rPr dirty="0"/>
+              <a:rPr sz="1300" dirty="0">
+                <a:latin typeface="微软雅黑" panose="020B0503020204020204" pitchFamily="34" charset="-122"/>
+                <a:ea typeface="微软雅黑" panose="020B0503020204020204" pitchFamily="34" charset="-122"/>
+              </a:rPr>
               <a:t>。</a:t>
             </a:r>
           </a:p>
@@ -7394,7 +7406,7 @@
         <p:spPr>
           <a:xfrm>
             <a:off x="749808" y="2414016"/>
-            <a:ext cx="3337560" cy="1626086"/>
+            <a:ext cx="3337560" cy="2026196"/>
           </a:xfrm>
           <a:prstGeom prst="rect">
             <a:avLst/>
@@ -7408,51 +7420,112 @@
           <a:lstStyle/>
           <a:p>
             <a:r>
-              <a:rPr sz="1300" dirty="0" err="1"/>
+              <a:rPr sz="1300" dirty="0" err="1">
+                <a:latin typeface="微软雅黑" panose="020B0503020204020204" pitchFamily="34" charset="-122"/>
+                <a:ea typeface="微软雅黑" panose="020B0503020204020204" pitchFamily="34" charset="-122"/>
+              </a:rPr>
               <a:t>分类：K线、行情快照、Tick数据</a:t>
             </a:r>
-            <a:endParaRPr lang="en-US" sz="1300" dirty="0"/>
-          </a:p>
-          <a:p>
-            <a:endParaRPr sz="1300" dirty="0"/>
-          </a:p>
-          <a:p>
-            <a:r>
-              <a:rPr sz="1300" dirty="0" err="1"/>
+            <a:endParaRPr lang="en-US" sz="1300" dirty="0">
+              <a:latin typeface="微软雅黑" panose="020B0503020204020204" pitchFamily="34" charset="-122"/>
+              <a:ea typeface="微软雅黑" panose="020B0503020204020204" pitchFamily="34" charset="-122"/>
+            </a:endParaRPr>
+          </a:p>
+          <a:p>
+            <a:endParaRPr sz="1300" dirty="0">
+              <a:latin typeface="微软雅黑" panose="020B0503020204020204" pitchFamily="34" charset="-122"/>
+              <a:ea typeface="微软雅黑" panose="020B0503020204020204" pitchFamily="34" charset="-122"/>
+            </a:endParaRPr>
+          </a:p>
+          <a:p>
+            <a:r>
+              <a:rPr sz="1300" dirty="0" err="1">
+                <a:latin typeface="微软雅黑" panose="020B0503020204020204" pitchFamily="34" charset="-122"/>
+                <a:ea typeface="微软雅黑" panose="020B0503020204020204" pitchFamily="34" charset="-122"/>
+              </a:rPr>
               <a:t>来源：交易所、Wind、Tushare</a:t>
             </a:r>
-            <a:endParaRPr lang="en-US" sz="1300" dirty="0"/>
-          </a:p>
-          <a:p>
-            <a:endParaRPr sz="1300" dirty="0"/>
-          </a:p>
-          <a:p>
-            <a:r>
-              <a:rPr sz="1300" dirty="0" err="1"/>
+            <a:endParaRPr lang="en-US" sz="1300" dirty="0">
+              <a:latin typeface="微软雅黑" panose="020B0503020204020204" pitchFamily="34" charset="-122"/>
+              <a:ea typeface="微软雅黑" panose="020B0503020204020204" pitchFamily="34" charset="-122"/>
+            </a:endParaRPr>
+          </a:p>
+          <a:p>
+            <a:endParaRPr sz="1300" dirty="0">
+              <a:latin typeface="微软雅黑" panose="020B0503020204020204" pitchFamily="34" charset="-122"/>
+              <a:ea typeface="微软雅黑" panose="020B0503020204020204" pitchFamily="34" charset="-122"/>
+            </a:endParaRPr>
+          </a:p>
+          <a:p>
+            <a:r>
+              <a:rPr sz="1300" dirty="0" err="1">
+                <a:latin typeface="微软雅黑" panose="020B0503020204020204" pitchFamily="34" charset="-122"/>
+                <a:ea typeface="微软雅黑" panose="020B0503020204020204" pitchFamily="34" charset="-122"/>
+              </a:rPr>
               <a:t>用途：构建趋势、反转、波动率、量仓共振</a:t>
             </a:r>
-            <a:endParaRPr lang="en-US" sz="1300" dirty="0"/>
-          </a:p>
-          <a:p>
-            <a:r>
-              <a:rPr lang="en-US" sz="1300" dirty="0"/>
-              <a:t>             </a:t>
-            </a:r>
-            <a:r>
-              <a:rPr sz="1300" dirty="0" err="1"/>
+            <a:endParaRPr lang="en-US" sz="1300" dirty="0">
+              <a:latin typeface="微软雅黑" panose="020B0503020204020204" pitchFamily="34" charset="-122"/>
+              <a:ea typeface="微软雅黑" panose="020B0503020204020204" pitchFamily="34" charset="-122"/>
+            </a:endParaRPr>
+          </a:p>
+          <a:p>
+            <a:r>
+              <a:rPr lang="en-US" sz="1300" dirty="0">
+                <a:latin typeface="微软雅黑" panose="020B0503020204020204" pitchFamily="34" charset="-122"/>
+                <a:ea typeface="微软雅黑" panose="020B0503020204020204" pitchFamily="34" charset="-122"/>
+              </a:rPr>
+              <a:t>          </a:t>
+            </a:r>
+            <a:r>
+              <a:rPr sz="1300" dirty="0" err="1">
+                <a:latin typeface="微软雅黑" panose="020B0503020204020204" pitchFamily="34" charset="-122"/>
+                <a:ea typeface="微软雅黑" panose="020B0503020204020204" pitchFamily="34" charset="-122"/>
+              </a:rPr>
               <a:t>与微观结构类因子</a:t>
             </a:r>
-            <a:endParaRPr lang="en-US" sz="1300" dirty="0"/>
-          </a:p>
-          <a:p>
-            <a:endParaRPr sz="1300" dirty="0"/>
-          </a:p>
-          <a:p>
-            <a:r>
-              <a:rPr sz="1300" dirty="0" err="1"/>
+            <a:endParaRPr lang="en-US" sz="1300" dirty="0">
+              <a:latin typeface="微软雅黑" panose="020B0503020204020204" pitchFamily="34" charset="-122"/>
+              <a:ea typeface="微软雅黑" panose="020B0503020204020204" pitchFamily="34" charset="-122"/>
+            </a:endParaRPr>
+          </a:p>
+          <a:p>
+            <a:endParaRPr sz="1300" dirty="0">
+              <a:latin typeface="微软雅黑" panose="020B0503020204020204" pitchFamily="34" charset="-122"/>
+              <a:ea typeface="微软雅黑" panose="020B0503020204020204" pitchFamily="34" charset="-122"/>
+            </a:endParaRPr>
+          </a:p>
+          <a:p>
+            <a:r>
+              <a:rPr sz="1300" dirty="0" err="1">
+                <a:latin typeface="微软雅黑" panose="020B0503020204020204" pitchFamily="34" charset="-122"/>
+                <a:ea typeface="微软雅黑" panose="020B0503020204020204" pitchFamily="34" charset="-122"/>
+              </a:rPr>
               <a:t>频率：覆盖毫秒级到日频</a:t>
             </a:r>
-            <a:endParaRPr sz="1300" dirty="0"/>
+            <a:endParaRPr lang="en-US" sz="1300" dirty="0">
+              <a:latin typeface="微软雅黑" panose="020B0503020204020204" pitchFamily="34" charset="-122"/>
+              <a:ea typeface="微软雅黑" panose="020B0503020204020204" pitchFamily="34" charset="-122"/>
+            </a:endParaRPr>
+          </a:p>
+          <a:p>
+            <a:endParaRPr lang="en-US" sz="1300" dirty="0">
+              <a:latin typeface="微软雅黑" panose="020B0503020204020204" pitchFamily="34" charset="-122"/>
+              <a:ea typeface="微软雅黑" panose="020B0503020204020204" pitchFamily="34" charset="-122"/>
+            </a:endParaRPr>
+          </a:p>
+          <a:p>
+            <a:r>
+              <a:rPr lang="zh-CN" altLang="en-US" sz="1300" dirty="0">
+                <a:latin typeface="微软雅黑" panose="020B0503020204020204" pitchFamily="34" charset="-122"/>
+                <a:ea typeface="微软雅黑" panose="020B0503020204020204" pitchFamily="34" charset="-122"/>
+              </a:rPr>
+              <a:t>质量：优</a:t>
+            </a:r>
+            <a:endParaRPr sz="1300" dirty="0">
+              <a:latin typeface="微软雅黑" panose="020B0503020204020204" pitchFamily="34" charset="-122"/>
+              <a:ea typeface="微软雅黑" panose="020B0503020204020204" pitchFamily="34" charset="-122"/>
+            </a:endParaRPr>
           </a:p>
         </p:txBody>
       </p:sp>
@@ -7591,7 +7664,7 @@
         <p:spPr>
           <a:xfrm>
             <a:off x="4453128" y="2414016"/>
-            <a:ext cx="3337560" cy="1826141"/>
+            <a:ext cx="3337560" cy="2241639"/>
           </a:xfrm>
           <a:prstGeom prst="rect">
             <a:avLst/>
@@ -7605,140 +7678,286 @@
           <a:lstStyle/>
           <a:p>
             <a:r>
-              <a:rPr sz="1300" dirty="0" err="1"/>
+              <a:rPr sz="1300" dirty="0" err="1">
+                <a:latin typeface="微软雅黑" panose="020B0503020204020204" pitchFamily="34" charset="-122"/>
+                <a:ea typeface="微软雅黑" panose="020B0503020204020204" pitchFamily="34" charset="-122"/>
+              </a:rPr>
               <a:t>分类：库存、开工率、现货价格、CPI、利率</a:t>
             </a:r>
-            <a:endParaRPr lang="en-US" sz="1300" dirty="0"/>
-          </a:p>
-          <a:p>
-            <a:r>
-              <a:rPr lang="en-US" sz="1300" dirty="0"/>
-              <a:t>            </a:t>
-            </a:r>
-            <a:r>
-              <a:rPr sz="1300" dirty="0" err="1"/>
+            <a:endParaRPr lang="en-US" sz="1300" dirty="0">
+              <a:latin typeface="微软雅黑" panose="020B0503020204020204" pitchFamily="34" charset="-122"/>
+              <a:ea typeface="微软雅黑" panose="020B0503020204020204" pitchFamily="34" charset="-122"/>
+            </a:endParaRPr>
+          </a:p>
+          <a:p>
+            <a:r>
+              <a:rPr lang="en-US" sz="1300" dirty="0">
+                <a:latin typeface="微软雅黑" panose="020B0503020204020204" pitchFamily="34" charset="-122"/>
+                <a:ea typeface="微软雅黑" panose="020B0503020204020204" pitchFamily="34" charset="-122"/>
+              </a:rPr>
+              <a:t>          </a:t>
+            </a:r>
+            <a:r>
+              <a:rPr sz="1300" dirty="0" err="1">
+                <a:latin typeface="微软雅黑" panose="020B0503020204020204" pitchFamily="34" charset="-122"/>
+                <a:ea typeface="微软雅黑" panose="020B0503020204020204" pitchFamily="34" charset="-122"/>
+              </a:rPr>
               <a:t>美元指数、信用利差</a:t>
             </a:r>
-            <a:endParaRPr lang="en-US" sz="1300" dirty="0"/>
-          </a:p>
-          <a:p>
-            <a:endParaRPr sz="1300" dirty="0"/>
-          </a:p>
-          <a:p>
-            <a:r>
-              <a:rPr sz="1300" dirty="0" err="1"/>
-              <a:t>来源：卓创资讯、钢联、上海有色网</a:t>
-            </a:r>
-            <a:r>
-              <a:rPr lang="zh-CN" altLang="en-US" sz="1300" dirty="0"/>
-              <a:t>、</a:t>
-            </a:r>
-            <a:r>
-              <a:rPr lang="zh-CN" altLang="en-US" sz="1300" dirty="0">
-                <a:latin typeface="微软雅黑" panose="020B0503020204020204" pitchFamily="34" charset="-122"/>
-                <a:ea typeface="微软雅黑" panose="020B0503020204020204" pitchFamily="34" charset="-122"/>
-              </a:rPr>
-              <a:t>彭博</a:t>
-            </a:r>
+            <a:endParaRPr lang="en-US" sz="1300" dirty="0">
+              <a:latin typeface="微软雅黑" panose="020B0503020204020204" pitchFamily="34" charset="-122"/>
+              <a:ea typeface="微软雅黑" panose="020B0503020204020204" pitchFamily="34" charset="-122"/>
+            </a:endParaRPr>
+          </a:p>
+          <a:p>
             <a:endParaRPr sz="1300" dirty="0">
               <a:latin typeface="微软雅黑" panose="020B0503020204020204" pitchFamily="34" charset="-122"/>
               <a:ea typeface="微软雅黑" panose="020B0503020204020204" pitchFamily="34" charset="-122"/>
             </a:endParaRPr>
           </a:p>
           <a:p>
-            <a:endParaRPr lang="en-US" sz="1300" dirty="0"/>
-          </a:p>
-          <a:p>
-            <a:r>
-              <a:rPr sz="1300" dirty="0" err="1"/>
+            <a:r>
+              <a:rPr sz="1300" dirty="0" err="1">
+                <a:latin typeface="微软雅黑" panose="020B0503020204020204" pitchFamily="34" charset="-122"/>
+                <a:ea typeface="微软雅黑" panose="020B0503020204020204" pitchFamily="34" charset="-122"/>
+              </a:rPr>
+              <a:t>来源：卓创资讯、钢联、上海有色网</a:t>
+            </a:r>
+            <a:r>
+              <a:rPr lang="zh-CN" altLang="en-US" sz="1300" dirty="0">
+                <a:latin typeface="微软雅黑" panose="020B0503020204020204" pitchFamily="34" charset="-122"/>
+                <a:ea typeface="微软雅黑" panose="020B0503020204020204" pitchFamily="34" charset="-122"/>
+              </a:rPr>
+              <a:t>、彭博</a:t>
+            </a:r>
+            <a:endParaRPr sz="1300" dirty="0">
+              <a:latin typeface="微软雅黑" panose="020B0503020204020204" pitchFamily="34" charset="-122"/>
+              <a:ea typeface="微软雅黑" panose="020B0503020204020204" pitchFamily="34" charset="-122"/>
+            </a:endParaRPr>
+          </a:p>
+          <a:p>
+            <a:endParaRPr lang="en-US" sz="1300" dirty="0">
+              <a:latin typeface="微软雅黑" panose="020B0503020204020204" pitchFamily="34" charset="-122"/>
+              <a:ea typeface="微软雅黑" panose="020B0503020204020204" pitchFamily="34" charset="-122"/>
+            </a:endParaRPr>
+          </a:p>
+          <a:p>
+            <a:r>
+              <a:rPr sz="1300" dirty="0" err="1">
+                <a:latin typeface="微软雅黑" panose="020B0503020204020204" pitchFamily="34" charset="-122"/>
+                <a:ea typeface="微软雅黑" panose="020B0503020204020204" pitchFamily="34" charset="-122"/>
+              </a:rPr>
               <a:t>用途：支持品种强弱排序、行业判断以及宏</a:t>
             </a:r>
-            <a:endParaRPr lang="en-US" sz="1300" dirty="0"/>
-          </a:p>
-          <a:p>
-            <a:r>
-              <a:rPr lang="en-US" sz="1300" dirty="0"/>
-              <a:t>             </a:t>
-            </a:r>
-            <a:r>
-              <a:rPr sz="1300" dirty="0" err="1"/>
+            <a:endParaRPr lang="en-US" sz="1300" dirty="0">
+              <a:latin typeface="微软雅黑" panose="020B0503020204020204" pitchFamily="34" charset="-122"/>
+              <a:ea typeface="微软雅黑" panose="020B0503020204020204" pitchFamily="34" charset="-122"/>
+            </a:endParaRPr>
+          </a:p>
+          <a:p>
+            <a:r>
+              <a:rPr lang="en-US" sz="1300" dirty="0">
+                <a:latin typeface="微软雅黑" panose="020B0503020204020204" pitchFamily="34" charset="-122"/>
+                <a:ea typeface="微软雅黑" panose="020B0503020204020204" pitchFamily="34" charset="-122"/>
+              </a:rPr>
+              <a:t>          </a:t>
+            </a:r>
+            <a:r>
+              <a:rPr sz="1300" dirty="0" err="1">
+                <a:latin typeface="微软雅黑" panose="020B0503020204020204" pitchFamily="34" charset="-122"/>
+                <a:ea typeface="微软雅黑" panose="020B0503020204020204" pitchFamily="34" charset="-122"/>
+              </a:rPr>
               <a:t>观环境识别</a:t>
             </a:r>
-            <a:endParaRPr sz="1300" dirty="0"/>
-          </a:p>
-          <a:p>
-            <a:endParaRPr lang="en-US" sz="1300" dirty="0"/>
-          </a:p>
-          <a:p>
-            <a:r>
-              <a:rPr sz="1300" dirty="0" err="1"/>
+            <a:endParaRPr sz="1300" dirty="0">
+              <a:latin typeface="微软雅黑" panose="020B0503020204020204" pitchFamily="34" charset="-122"/>
+              <a:ea typeface="微软雅黑" panose="020B0503020204020204" pitchFamily="34" charset="-122"/>
+            </a:endParaRPr>
+          </a:p>
+          <a:p>
+            <a:endParaRPr lang="en-US" sz="1300" dirty="0">
+              <a:latin typeface="微软雅黑" panose="020B0503020204020204" pitchFamily="34" charset="-122"/>
+              <a:ea typeface="微软雅黑" panose="020B0503020204020204" pitchFamily="34" charset="-122"/>
+            </a:endParaRPr>
+          </a:p>
+          <a:p>
+            <a:r>
+              <a:rPr sz="1300" dirty="0" err="1">
+                <a:latin typeface="微软雅黑" panose="020B0503020204020204" pitchFamily="34" charset="-122"/>
+                <a:ea typeface="微软雅黑" panose="020B0503020204020204" pitchFamily="34" charset="-122"/>
+              </a:rPr>
               <a:t>频率：日</a:t>
             </a:r>
             <a:r>
-              <a:rPr lang="en-US" sz="1300" dirty="0"/>
+              <a:rPr lang="en-US" sz="1300" dirty="0">
+                <a:latin typeface="微软雅黑" panose="020B0503020204020204" pitchFamily="34" charset="-122"/>
+                <a:ea typeface="微软雅黑" panose="020B0503020204020204" pitchFamily="34" charset="-122"/>
+              </a:rPr>
               <a:t> </a:t>
             </a:r>
             <a:r>
-              <a:rPr sz="1300" dirty="0"/>
+              <a:rPr sz="1300" dirty="0">
+                <a:latin typeface="微软雅黑" panose="020B0503020204020204" pitchFamily="34" charset="-122"/>
+                <a:ea typeface="微软雅黑" panose="020B0503020204020204" pitchFamily="34" charset="-122"/>
+              </a:rPr>
               <a:t>/</a:t>
             </a:r>
             <a:r>
-              <a:rPr lang="en-US" sz="1300" dirty="0"/>
+              <a:rPr lang="en-US" sz="1300" dirty="0">
+                <a:latin typeface="微软雅黑" panose="020B0503020204020204" pitchFamily="34" charset="-122"/>
+                <a:ea typeface="微软雅黑" panose="020B0503020204020204" pitchFamily="34" charset="-122"/>
+              </a:rPr>
               <a:t> </a:t>
             </a:r>
             <a:r>
-              <a:rPr sz="1300" dirty="0"/>
+              <a:rPr sz="1300" dirty="0">
+                <a:latin typeface="微软雅黑" panose="020B0503020204020204" pitchFamily="34" charset="-122"/>
+                <a:ea typeface="微软雅黑" panose="020B0503020204020204" pitchFamily="34" charset="-122"/>
+              </a:rPr>
               <a:t>周</a:t>
             </a:r>
             <a:r>
-              <a:rPr lang="en-US" sz="1300" dirty="0"/>
+              <a:rPr lang="en-US" sz="1300" dirty="0">
+                <a:latin typeface="微软雅黑" panose="020B0503020204020204" pitchFamily="34" charset="-122"/>
+                <a:ea typeface="微软雅黑" panose="020B0503020204020204" pitchFamily="34" charset="-122"/>
+              </a:rPr>
               <a:t> </a:t>
             </a:r>
             <a:r>
-              <a:rPr sz="1300" dirty="0"/>
+              <a:rPr sz="1300" dirty="0">
+                <a:latin typeface="微软雅黑" panose="020B0503020204020204" pitchFamily="34" charset="-122"/>
+                <a:ea typeface="微软雅黑" panose="020B0503020204020204" pitchFamily="34" charset="-122"/>
+              </a:rPr>
               <a:t>/</a:t>
             </a:r>
             <a:r>
-              <a:rPr lang="en-US" sz="1300" dirty="0"/>
+              <a:rPr lang="en-US" sz="1300" dirty="0">
+                <a:latin typeface="微软雅黑" panose="020B0503020204020204" pitchFamily="34" charset="-122"/>
+                <a:ea typeface="微软雅黑" panose="020B0503020204020204" pitchFamily="34" charset="-122"/>
+              </a:rPr>
               <a:t> </a:t>
             </a:r>
             <a:r>
-              <a:rPr sz="1300" dirty="0"/>
+              <a:rPr sz="1300" dirty="0">
+                <a:latin typeface="微软雅黑" panose="020B0503020204020204" pitchFamily="34" charset="-122"/>
+                <a:ea typeface="微软雅黑" panose="020B0503020204020204" pitchFamily="34" charset="-122"/>
+              </a:rPr>
               <a:t>月</a:t>
             </a:r>
             <a:r>
-              <a:rPr lang="en-US" sz="1300" dirty="0"/>
+              <a:rPr lang="en-US" sz="1300" dirty="0">
+                <a:latin typeface="微软雅黑" panose="020B0503020204020204" pitchFamily="34" charset="-122"/>
+                <a:ea typeface="微软雅黑" panose="020B0503020204020204" pitchFamily="34" charset="-122"/>
+              </a:rPr>
               <a:t> </a:t>
             </a:r>
             <a:r>
-              <a:rPr sz="1300" dirty="0"/>
+              <a:rPr sz="1300" dirty="0">
+                <a:latin typeface="微软雅黑" panose="020B0503020204020204" pitchFamily="34" charset="-122"/>
+                <a:ea typeface="微软雅黑" panose="020B0503020204020204" pitchFamily="34" charset="-122"/>
+              </a:rPr>
               <a:t>/</a:t>
             </a:r>
             <a:r>
-              <a:rPr lang="en-US" sz="1300" dirty="0"/>
+              <a:rPr lang="en-US" sz="1300" dirty="0">
+                <a:latin typeface="微软雅黑" panose="020B0503020204020204" pitchFamily="34" charset="-122"/>
+                <a:ea typeface="微软雅黑" panose="020B0503020204020204" pitchFamily="34" charset="-122"/>
+              </a:rPr>
               <a:t> </a:t>
             </a:r>
             <a:r>
-              <a:rPr sz="1300" dirty="0"/>
+              <a:rPr sz="1300" dirty="0">
+                <a:latin typeface="微软雅黑" panose="020B0503020204020204" pitchFamily="34" charset="-122"/>
+                <a:ea typeface="微软雅黑" panose="020B0503020204020204" pitchFamily="34" charset="-122"/>
+              </a:rPr>
               <a:t>季</a:t>
             </a:r>
             <a:r>
-              <a:rPr lang="en-US" sz="1300" dirty="0"/>
+              <a:rPr lang="en-US" sz="1300" dirty="0">
+                <a:latin typeface="微软雅黑" panose="020B0503020204020204" pitchFamily="34" charset="-122"/>
+                <a:ea typeface="微软雅黑" panose="020B0503020204020204" pitchFamily="34" charset="-122"/>
+              </a:rPr>
               <a:t> </a:t>
             </a:r>
             <a:r>
-              <a:rPr sz="1300" dirty="0"/>
+              <a:rPr sz="1300" dirty="0">
+                <a:latin typeface="微软雅黑" panose="020B0503020204020204" pitchFamily="34" charset="-122"/>
+                <a:ea typeface="微软雅黑" panose="020B0503020204020204" pitchFamily="34" charset="-122"/>
+              </a:rPr>
               <a:t>/</a:t>
             </a:r>
             <a:r>
-              <a:rPr lang="en-US" sz="1300" dirty="0"/>
+              <a:rPr lang="en-US" sz="1300" dirty="0">
+                <a:latin typeface="微软雅黑" panose="020B0503020204020204" pitchFamily="34" charset="-122"/>
+                <a:ea typeface="微软雅黑" panose="020B0503020204020204" pitchFamily="34" charset="-122"/>
+              </a:rPr>
               <a:t> </a:t>
             </a:r>
             <a:r>
-              <a:rPr sz="1300" dirty="0" err="1"/>
+              <a:rPr sz="1300" dirty="0" err="1">
+                <a:latin typeface="微软雅黑" panose="020B0503020204020204" pitchFamily="34" charset="-122"/>
+                <a:ea typeface="微软雅黑" panose="020B0503020204020204" pitchFamily="34" charset="-122"/>
+              </a:rPr>
               <a:t>年都覆盖</a:t>
             </a:r>
-            <a:endParaRPr sz="1300" dirty="0"/>
+            <a:endParaRPr lang="en-US" sz="1300" dirty="0">
+              <a:latin typeface="微软雅黑" panose="020B0503020204020204" pitchFamily="34" charset="-122"/>
+              <a:ea typeface="微软雅黑" panose="020B0503020204020204" pitchFamily="34" charset="-122"/>
+            </a:endParaRPr>
+          </a:p>
+          <a:p>
+            <a:endParaRPr lang="en-US" sz="1300" dirty="0">
+              <a:latin typeface="微软雅黑" panose="020B0503020204020204" pitchFamily="34" charset="-122"/>
+              <a:ea typeface="微软雅黑" panose="020B0503020204020204" pitchFamily="34" charset="-122"/>
+            </a:endParaRPr>
+          </a:p>
+          <a:p>
+            <a:r>
+              <a:rPr lang="zh-CN" altLang="en-US" sz="1300" dirty="0">
+                <a:latin typeface="微软雅黑" panose="020B0503020204020204" pitchFamily="34" charset="-122"/>
+                <a:ea typeface="微软雅黑" panose="020B0503020204020204" pitchFamily="34" charset="-122"/>
+              </a:rPr>
+              <a:t>质量：差，</a:t>
+            </a:r>
+            <a:r>
+              <a:rPr lang="zh-CN" altLang="en-US" sz="1400" dirty="0">
+                <a:latin typeface="微软雅黑" panose="020B0503020204020204" pitchFamily="34" charset="-122"/>
+                <a:ea typeface="微软雅黑" panose="020B0503020204020204" pitchFamily="34" charset="-122"/>
+              </a:rPr>
+              <a:t>会出现提前</a:t>
+            </a:r>
+            <a:r>
+              <a:rPr lang="en-US" altLang="zh-CN" sz="1400" dirty="0">
+                <a:latin typeface="微软雅黑" panose="020B0503020204020204" pitchFamily="34" charset="-122"/>
+                <a:ea typeface="微软雅黑" panose="020B0503020204020204" pitchFamily="34" charset="-122"/>
+              </a:rPr>
+              <a:t>/</a:t>
+            </a:r>
+            <a:r>
+              <a:rPr lang="zh-CN" altLang="en-US" sz="1400" dirty="0">
+                <a:latin typeface="微软雅黑" panose="020B0503020204020204" pitchFamily="34" charset="-122"/>
+                <a:ea typeface="微软雅黑" panose="020B0503020204020204" pitchFamily="34" charset="-122"/>
+              </a:rPr>
+              <a:t>延迟</a:t>
+            </a:r>
+            <a:r>
+              <a:rPr lang="en-US" altLang="zh-CN" sz="1400" dirty="0">
+                <a:latin typeface="微软雅黑" panose="020B0503020204020204" pitchFamily="34" charset="-122"/>
+                <a:ea typeface="微软雅黑" panose="020B0503020204020204" pitchFamily="34" charset="-122"/>
+              </a:rPr>
+              <a:t>/</a:t>
+            </a:r>
+            <a:r>
+              <a:rPr lang="zh-CN" altLang="en-US" sz="1400" dirty="0">
+                <a:latin typeface="微软雅黑" panose="020B0503020204020204" pitchFamily="34" charset="-122"/>
+                <a:ea typeface="微软雅黑" panose="020B0503020204020204" pitchFamily="34" charset="-122"/>
+              </a:rPr>
+              <a:t>二次更新</a:t>
+            </a:r>
+            <a:endParaRPr lang="zh-CN" altLang="en-US" sz="1300" dirty="0">
+              <a:latin typeface="微软雅黑" panose="020B0503020204020204" pitchFamily="34" charset="-122"/>
+              <a:ea typeface="微软雅黑" panose="020B0503020204020204" pitchFamily="34" charset="-122"/>
+            </a:endParaRPr>
           </a:p>
         </p:txBody>
       </p:sp>
@@ -7750,7 +7969,7 @@
         </p:nvSpPr>
         <p:spPr>
           <a:xfrm>
-            <a:off x="7955279" y="1645920"/>
+            <a:off x="7955280" y="1645920"/>
             <a:ext cx="3703320" cy="4297680"/>
           </a:xfrm>
           <a:prstGeom prst="roundRect">
@@ -7877,7 +8096,7 @@
         <p:spPr>
           <a:xfrm>
             <a:off x="8156448" y="2414016"/>
-            <a:ext cx="3337560" cy="1826141"/>
+            <a:ext cx="3337560" cy="2226250"/>
           </a:xfrm>
           <a:prstGeom prst="rect">
             <a:avLst/>
@@ -7891,46 +8110,69 @@
           <a:lstStyle/>
           <a:p>
             <a:r>
-              <a:rPr sz="1300" dirty="0" err="1"/>
+              <a:rPr sz="1300" dirty="0" err="1">
+                <a:latin typeface="微软雅黑" panose="020B0503020204020204" pitchFamily="34" charset="-122"/>
+                <a:ea typeface="微软雅黑" panose="020B0503020204020204" pitchFamily="34" charset="-122"/>
+              </a:rPr>
               <a:t>分类：卫星图像、分析师预测、各类第三方</a:t>
             </a:r>
-            <a:endParaRPr lang="en-US" sz="1300" dirty="0"/>
-          </a:p>
-          <a:p>
-            <a:r>
-              <a:rPr lang="en-US" sz="1300" dirty="0"/>
-              <a:t>             </a:t>
-            </a:r>
-            <a:r>
-              <a:rPr sz="1300" dirty="0" err="1"/>
+            <a:endParaRPr lang="en-US" sz="1300" dirty="0">
+              <a:latin typeface="微软雅黑" panose="020B0503020204020204" pitchFamily="34" charset="-122"/>
+              <a:ea typeface="微软雅黑" panose="020B0503020204020204" pitchFamily="34" charset="-122"/>
+            </a:endParaRPr>
+          </a:p>
+          <a:p>
+            <a:r>
+              <a:rPr lang="en-US" sz="1300" dirty="0">
+                <a:latin typeface="微软雅黑" panose="020B0503020204020204" pitchFamily="34" charset="-122"/>
+                <a:ea typeface="微软雅黑" panose="020B0503020204020204" pitchFamily="34" charset="-122"/>
+              </a:rPr>
+              <a:t>          </a:t>
+            </a:r>
+            <a:r>
+              <a:rPr sz="1300" dirty="0" err="1">
+                <a:latin typeface="微软雅黑" panose="020B0503020204020204" pitchFamily="34" charset="-122"/>
+                <a:ea typeface="微软雅黑" panose="020B0503020204020204" pitchFamily="34" charset="-122"/>
+              </a:rPr>
               <a:t>事件数据</a:t>
             </a:r>
-            <a:endParaRPr lang="en-US" sz="1300" dirty="0"/>
-          </a:p>
-          <a:p>
-            <a:endParaRPr sz="1300" dirty="0"/>
-          </a:p>
-          <a:p>
-            <a:r>
-              <a:rPr sz="1300" dirty="0" err="1"/>
+            <a:endParaRPr lang="en-US" sz="1300" dirty="0">
+              <a:latin typeface="微软雅黑" panose="020B0503020204020204" pitchFamily="34" charset="-122"/>
+              <a:ea typeface="微软雅黑" panose="020B0503020204020204" pitchFamily="34" charset="-122"/>
+            </a:endParaRPr>
+          </a:p>
+          <a:p>
+            <a:endParaRPr sz="1300" dirty="0">
+              <a:latin typeface="微软雅黑" panose="020B0503020204020204" pitchFamily="34" charset="-122"/>
+              <a:ea typeface="微软雅黑" panose="020B0503020204020204" pitchFamily="34" charset="-122"/>
+            </a:endParaRPr>
+          </a:p>
+          <a:p>
+            <a:r>
+              <a:rPr sz="1300" dirty="0" err="1">
+                <a:latin typeface="微软雅黑" panose="020B0503020204020204" pitchFamily="34" charset="-122"/>
+                <a:ea typeface="微软雅黑" panose="020B0503020204020204" pitchFamily="34" charset="-122"/>
+              </a:rPr>
               <a:t>来源：第三方数据供应商</a:t>
             </a:r>
-            <a:endParaRPr sz="1300" dirty="0"/>
-          </a:p>
-          <a:p>
-            <a:endParaRPr lang="en-US" sz="1300" dirty="0"/>
-          </a:p>
-          <a:p>
-            <a:r>
-              <a:rPr sz="1300" dirty="0" err="1"/>
-              <a:t>用途：</a:t>
-            </a:r>
+            <a:endParaRPr sz="1300" dirty="0">
+              <a:latin typeface="微软雅黑" panose="020B0503020204020204" pitchFamily="34" charset="-122"/>
+              <a:ea typeface="微软雅黑" panose="020B0503020204020204" pitchFamily="34" charset="-122"/>
+            </a:endParaRPr>
+          </a:p>
+          <a:p>
+            <a:endParaRPr lang="en-US" sz="1300" dirty="0">
+              <a:latin typeface="微软雅黑" panose="020B0503020204020204" pitchFamily="34" charset="-122"/>
+              <a:ea typeface="微软雅黑" panose="020B0503020204020204" pitchFamily="34" charset="-122"/>
+            </a:endParaRPr>
+          </a:p>
+          <a:p>
             <a:r>
               <a:rPr sz="1300" dirty="0" err="1">
                 <a:latin typeface="微软雅黑" panose="020B0503020204020204" pitchFamily="34" charset="-122"/>
                 <a:ea typeface="微软雅黑" panose="020B0503020204020204" pitchFamily="34" charset="-122"/>
               </a:rPr>
-              <a:t>补充传统数据难覆盖的</a:t>
+              <a:t>用途：补充传统数据难覆盖的</a:t>
             </a:r>
             <a:r>
               <a:rPr lang="zh-CN" altLang="en-US" sz="1300" dirty="0">
@@ -7993,78 +8235,150 @@
             </a:endParaRPr>
           </a:p>
           <a:p>
-            <a:endParaRPr lang="en-US" sz="1300" dirty="0"/>
-          </a:p>
-          <a:p>
-            <a:r>
-              <a:rPr sz="1300" dirty="0" err="1"/>
+            <a:endParaRPr lang="en-US" sz="1300" dirty="0">
+              <a:latin typeface="微软雅黑" panose="020B0503020204020204" pitchFamily="34" charset="-122"/>
+              <a:ea typeface="微软雅黑" panose="020B0503020204020204" pitchFamily="34" charset="-122"/>
+            </a:endParaRPr>
+          </a:p>
+          <a:p>
+            <a:r>
+              <a:rPr sz="1300" dirty="0" err="1">
+                <a:latin typeface="微软雅黑" panose="020B0503020204020204" pitchFamily="34" charset="-122"/>
+                <a:ea typeface="微软雅黑" panose="020B0503020204020204" pitchFamily="34" charset="-122"/>
+              </a:rPr>
               <a:t>频率：日</a:t>
             </a:r>
             <a:r>
-              <a:rPr lang="en-US" sz="1300" dirty="0"/>
+              <a:rPr lang="en-US" sz="1300" dirty="0">
+                <a:latin typeface="微软雅黑" panose="020B0503020204020204" pitchFamily="34" charset="-122"/>
+                <a:ea typeface="微软雅黑" panose="020B0503020204020204" pitchFamily="34" charset="-122"/>
+              </a:rPr>
               <a:t> </a:t>
             </a:r>
             <a:r>
-              <a:rPr sz="1300" dirty="0"/>
+              <a:rPr sz="1300" dirty="0">
+                <a:latin typeface="微软雅黑" panose="020B0503020204020204" pitchFamily="34" charset="-122"/>
+                <a:ea typeface="微软雅黑" panose="020B0503020204020204" pitchFamily="34" charset="-122"/>
+              </a:rPr>
               <a:t>/</a:t>
             </a:r>
             <a:r>
-              <a:rPr lang="en-US" sz="1300" dirty="0"/>
+              <a:rPr lang="en-US" sz="1300" dirty="0">
+                <a:latin typeface="微软雅黑" panose="020B0503020204020204" pitchFamily="34" charset="-122"/>
+                <a:ea typeface="微软雅黑" panose="020B0503020204020204" pitchFamily="34" charset="-122"/>
+              </a:rPr>
               <a:t> </a:t>
             </a:r>
             <a:r>
-              <a:rPr sz="1300" dirty="0"/>
+              <a:rPr sz="1300" dirty="0">
+                <a:latin typeface="微软雅黑" panose="020B0503020204020204" pitchFamily="34" charset="-122"/>
+                <a:ea typeface="微软雅黑" panose="020B0503020204020204" pitchFamily="34" charset="-122"/>
+              </a:rPr>
               <a:t>周</a:t>
             </a:r>
             <a:r>
-              <a:rPr lang="en-US" sz="1300" dirty="0"/>
+              <a:rPr lang="en-US" sz="1300" dirty="0">
+                <a:latin typeface="微软雅黑" panose="020B0503020204020204" pitchFamily="34" charset="-122"/>
+                <a:ea typeface="微软雅黑" panose="020B0503020204020204" pitchFamily="34" charset="-122"/>
+              </a:rPr>
               <a:t> </a:t>
             </a:r>
             <a:r>
-              <a:rPr sz="1300" dirty="0"/>
+              <a:rPr sz="1300" dirty="0">
+                <a:latin typeface="微软雅黑" panose="020B0503020204020204" pitchFamily="34" charset="-122"/>
+                <a:ea typeface="微软雅黑" panose="020B0503020204020204" pitchFamily="34" charset="-122"/>
+              </a:rPr>
               <a:t>/</a:t>
             </a:r>
             <a:r>
-              <a:rPr lang="en-US" sz="1300" dirty="0"/>
+              <a:rPr lang="en-US" sz="1300" dirty="0">
+                <a:latin typeface="微软雅黑" panose="020B0503020204020204" pitchFamily="34" charset="-122"/>
+                <a:ea typeface="微软雅黑" panose="020B0503020204020204" pitchFamily="34" charset="-122"/>
+              </a:rPr>
               <a:t> </a:t>
             </a:r>
             <a:r>
-              <a:rPr sz="1300" dirty="0"/>
+              <a:rPr sz="1300" dirty="0">
+                <a:latin typeface="微软雅黑" panose="020B0503020204020204" pitchFamily="34" charset="-122"/>
+                <a:ea typeface="微软雅黑" panose="020B0503020204020204" pitchFamily="34" charset="-122"/>
+              </a:rPr>
               <a:t>月</a:t>
             </a:r>
             <a:r>
-              <a:rPr lang="en-US" sz="1300" dirty="0"/>
+              <a:rPr lang="en-US" sz="1300" dirty="0">
+                <a:latin typeface="微软雅黑" panose="020B0503020204020204" pitchFamily="34" charset="-122"/>
+                <a:ea typeface="微软雅黑" panose="020B0503020204020204" pitchFamily="34" charset="-122"/>
+              </a:rPr>
               <a:t> </a:t>
             </a:r>
             <a:r>
-              <a:rPr sz="1300" dirty="0"/>
+              <a:rPr sz="1300" dirty="0">
+                <a:latin typeface="微软雅黑" panose="020B0503020204020204" pitchFamily="34" charset="-122"/>
+                <a:ea typeface="微软雅黑" panose="020B0503020204020204" pitchFamily="34" charset="-122"/>
+              </a:rPr>
               <a:t>/</a:t>
             </a:r>
             <a:r>
-              <a:rPr lang="en-US" sz="1300" dirty="0"/>
+              <a:rPr lang="en-US" sz="1300" dirty="0">
+                <a:latin typeface="微软雅黑" panose="020B0503020204020204" pitchFamily="34" charset="-122"/>
+                <a:ea typeface="微软雅黑" panose="020B0503020204020204" pitchFamily="34" charset="-122"/>
+              </a:rPr>
               <a:t> </a:t>
             </a:r>
             <a:r>
-              <a:rPr sz="1300" dirty="0"/>
+              <a:rPr sz="1300" dirty="0">
+                <a:latin typeface="微软雅黑" panose="020B0503020204020204" pitchFamily="34" charset="-122"/>
+                <a:ea typeface="微软雅黑" panose="020B0503020204020204" pitchFamily="34" charset="-122"/>
+              </a:rPr>
               <a:t>季</a:t>
             </a:r>
             <a:r>
-              <a:rPr lang="en-US" sz="1300" dirty="0"/>
+              <a:rPr lang="en-US" sz="1300" dirty="0">
+                <a:latin typeface="微软雅黑" panose="020B0503020204020204" pitchFamily="34" charset="-122"/>
+                <a:ea typeface="微软雅黑" panose="020B0503020204020204" pitchFamily="34" charset="-122"/>
+              </a:rPr>
               <a:t> </a:t>
             </a:r>
             <a:r>
-              <a:rPr sz="1300" dirty="0"/>
+              <a:rPr sz="1300" dirty="0">
+                <a:latin typeface="微软雅黑" panose="020B0503020204020204" pitchFamily="34" charset="-122"/>
+                <a:ea typeface="微软雅黑" panose="020B0503020204020204" pitchFamily="34" charset="-122"/>
+              </a:rPr>
               <a:t>/</a:t>
             </a:r>
             <a:r>
-              <a:rPr lang="en-US" sz="1300" dirty="0"/>
+              <a:rPr lang="en-US" sz="1300" dirty="0">
+                <a:latin typeface="微软雅黑" panose="020B0503020204020204" pitchFamily="34" charset="-122"/>
+                <a:ea typeface="微软雅黑" panose="020B0503020204020204" pitchFamily="34" charset="-122"/>
+              </a:rPr>
               <a:t> </a:t>
             </a:r>
             <a:r>
-              <a:rPr sz="1300" dirty="0" err="1"/>
+              <a:rPr sz="1300" dirty="0" err="1">
+                <a:latin typeface="微软雅黑" panose="020B0503020204020204" pitchFamily="34" charset="-122"/>
+                <a:ea typeface="微软雅黑" panose="020B0503020204020204" pitchFamily="34" charset="-122"/>
+              </a:rPr>
               <a:t>年都覆盖</a:t>
             </a:r>
-            <a:endParaRPr sz="1300" dirty="0"/>
+            <a:endParaRPr lang="en-US" sz="1300" dirty="0">
+              <a:latin typeface="微软雅黑" panose="020B0503020204020204" pitchFamily="34" charset="-122"/>
+              <a:ea typeface="微软雅黑" panose="020B0503020204020204" pitchFamily="34" charset="-122"/>
+            </a:endParaRPr>
+          </a:p>
+          <a:p>
+            <a:endParaRPr lang="en-US" sz="1300" dirty="0">
+              <a:latin typeface="微软雅黑" panose="020B0503020204020204" pitchFamily="34" charset="-122"/>
+              <a:ea typeface="微软雅黑" panose="020B0503020204020204" pitchFamily="34" charset="-122"/>
+            </a:endParaRPr>
+          </a:p>
+          <a:p>
+            <a:r>
+              <a:rPr lang="zh-CN" altLang="en-US" sz="1300" dirty="0">
+                <a:latin typeface="微软雅黑" panose="020B0503020204020204" pitchFamily="34" charset="-122"/>
+                <a:ea typeface="微软雅黑" panose="020B0503020204020204" pitchFamily="34" charset="-122"/>
+              </a:rPr>
+              <a:t>质量：差，噪声高，非结构化</a:t>
+            </a:r>
           </a:p>
         </p:txBody>
       </p:sp>
@@ -8441,7 +8755,7 @@
         <p:spPr>
           <a:xfrm>
             <a:off x="795528" y="2459736"/>
-            <a:ext cx="3246120" cy="2646878"/>
+            <a:ext cx="3246120" cy="2041585"/>
           </a:xfrm>
           <a:prstGeom prst="rect">
             <a:avLst/>
@@ -8466,11 +8780,17 @@
               </a:defRPr>
             </a:pPr>
             <a:r>
-              <a:rPr dirty="0" err="1"/>
+              <a:rPr dirty="0" err="1">
+                <a:latin typeface="微软雅黑" panose="020B0503020204020204" pitchFamily="34" charset="-122"/>
+                <a:ea typeface="微软雅黑" panose="020B0503020204020204" pitchFamily="34" charset="-122"/>
+              </a:rPr>
               <a:t>分类：趋势类、反转类</a:t>
             </a:r>
             <a:r>
-              <a:rPr dirty="0"/>
+              <a:rPr dirty="0">
+                <a:latin typeface="微软雅黑" panose="020B0503020204020204" pitchFamily="34" charset="-122"/>
+                <a:ea typeface="微软雅黑" panose="020B0503020204020204" pitchFamily="34" charset="-122"/>
+              </a:rPr>
               <a:t>、</a:t>
             </a:r>
             <a:r>
@@ -8481,10 +8801,16 @@
               <a:t>微观</a:t>
             </a:r>
             <a:r>
-              <a:rPr dirty="0" err="1"/>
+              <a:rPr dirty="0" err="1">
+                <a:latin typeface="微软雅黑" panose="020B0503020204020204" pitchFamily="34" charset="-122"/>
+                <a:ea typeface="微软雅黑" panose="020B0503020204020204" pitchFamily="34" charset="-122"/>
+              </a:rPr>
               <a:t>结构、高频类</a:t>
             </a:r>
-            <a:endParaRPr dirty="0"/>
+            <a:endParaRPr dirty="0">
+              <a:latin typeface="微软雅黑" panose="020B0503020204020204" pitchFamily="34" charset="-122"/>
+              <a:ea typeface="微软雅黑" panose="020B0503020204020204" pitchFamily="34" charset="-122"/>
+            </a:endParaRPr>
           </a:p>
           <a:p>
             <a:pPr>
@@ -8499,10 +8825,16 @@
               </a:defRPr>
             </a:pPr>
             <a:r>
-              <a:rPr dirty="0" err="1"/>
+              <a:rPr dirty="0" err="1">
+                <a:latin typeface="微软雅黑" panose="020B0503020204020204" pitchFamily="34" charset="-122"/>
+                <a:ea typeface="微软雅黑" panose="020B0503020204020204" pitchFamily="34" charset="-122"/>
+              </a:rPr>
               <a:t>示例：双均线、收益率偏度、能量潮、订单</a:t>
             </a:r>
-            <a:endParaRPr lang="en-US" dirty="0"/>
+            <a:endParaRPr lang="en-US" dirty="0">
+              <a:latin typeface="微软雅黑" panose="020B0503020204020204" pitchFamily="34" charset="-122"/>
+              <a:ea typeface="微软雅黑" panose="020B0503020204020204" pitchFamily="34" charset="-122"/>
+            </a:endParaRPr>
           </a:p>
           <a:p>
             <a:pPr>
@@ -8517,14 +8849,23 @@
               </a:defRPr>
             </a:pPr>
             <a:r>
-              <a:rPr lang="en-US" dirty="0"/>
+              <a:rPr lang="en-US" dirty="0">
+                <a:latin typeface="微软雅黑" panose="020B0503020204020204" pitchFamily="34" charset="-122"/>
+                <a:ea typeface="微软雅黑" panose="020B0503020204020204" pitchFamily="34" charset="-122"/>
+              </a:rPr>
               <a:t>          </a:t>
             </a:r>
             <a:r>
-              <a:rPr dirty="0" err="1"/>
+              <a:rPr dirty="0" err="1">
+                <a:latin typeface="微软雅黑" panose="020B0503020204020204" pitchFamily="34" charset="-122"/>
+                <a:ea typeface="微软雅黑" panose="020B0503020204020204" pitchFamily="34" charset="-122"/>
+              </a:rPr>
               <a:t>簿不平衡、微价格偏差</a:t>
             </a:r>
-            <a:endParaRPr dirty="0"/>
+            <a:endParaRPr dirty="0">
+              <a:latin typeface="微软雅黑" panose="020B0503020204020204" pitchFamily="34" charset="-122"/>
+              <a:ea typeface="微软雅黑" panose="020B0503020204020204" pitchFamily="34" charset="-122"/>
+            </a:endParaRPr>
           </a:p>
           <a:p>
             <a:pPr>
@@ -8539,11 +8880,17 @@
               </a:defRPr>
             </a:pPr>
             <a:r>
-              <a:rPr dirty="0" err="1"/>
+              <a:rPr dirty="0" err="1">
+                <a:latin typeface="微软雅黑" panose="020B0503020204020204" pitchFamily="34" charset="-122"/>
+                <a:ea typeface="微软雅黑" panose="020B0503020204020204" pitchFamily="34" charset="-122"/>
+              </a:rPr>
               <a:t>优点：更新频率高、响应速度快、可直接映</a:t>
             </a:r>
             <a:r>
-              <a:rPr lang="en-US" dirty="0"/>
+              <a:rPr lang="en-US" dirty="0">
+                <a:latin typeface="微软雅黑" panose="020B0503020204020204" pitchFamily="34" charset="-122"/>
+                <a:ea typeface="微软雅黑" panose="020B0503020204020204" pitchFamily="34" charset="-122"/>
+              </a:rPr>
               <a:t> </a:t>
             </a:r>
           </a:p>
@@ -8560,14 +8907,23 @@
               </a:defRPr>
             </a:pPr>
             <a:r>
-              <a:rPr lang="en-US" dirty="0"/>
+              <a:rPr lang="en-US" dirty="0">
+                <a:latin typeface="微软雅黑" panose="020B0503020204020204" pitchFamily="34" charset="-122"/>
+                <a:ea typeface="微软雅黑" panose="020B0503020204020204" pitchFamily="34" charset="-122"/>
+              </a:rPr>
               <a:t>          </a:t>
             </a:r>
             <a:r>
-              <a:rPr dirty="0" err="1"/>
+              <a:rPr dirty="0" err="1">
+                <a:latin typeface="微软雅黑" panose="020B0503020204020204" pitchFamily="34" charset="-122"/>
+                <a:ea typeface="微软雅黑" panose="020B0503020204020204" pitchFamily="34" charset="-122"/>
+              </a:rPr>
               <a:t>射交易行为</a:t>
             </a:r>
-            <a:endParaRPr dirty="0"/>
+            <a:endParaRPr dirty="0">
+              <a:latin typeface="微软雅黑" panose="020B0503020204020204" pitchFamily="34" charset="-122"/>
+              <a:ea typeface="微软雅黑" panose="020B0503020204020204" pitchFamily="34" charset="-122"/>
+            </a:endParaRPr>
           </a:p>
           <a:p>
             <a:pPr>
@@ -8582,11 +8938,17 @@
               </a:defRPr>
             </a:pPr>
             <a:r>
-              <a:rPr dirty="0" err="1"/>
+              <a:rPr dirty="0" err="1">
+                <a:latin typeface="微软雅黑" panose="020B0503020204020204" pitchFamily="34" charset="-122"/>
+                <a:ea typeface="微软雅黑" panose="020B0503020204020204" pitchFamily="34" charset="-122"/>
+              </a:rPr>
               <a:t>适配：适合趋势主导、波动放大、情绪切</a:t>
             </a:r>
             <a:r>
-              <a:rPr lang="en-US" dirty="0"/>
+              <a:rPr lang="en-US" dirty="0">
+                <a:latin typeface="微软雅黑" panose="020B0503020204020204" pitchFamily="34" charset="-122"/>
+                <a:ea typeface="微软雅黑" panose="020B0503020204020204" pitchFamily="34" charset="-122"/>
+              </a:rPr>
               <a:t>     </a:t>
             </a:r>
           </a:p>
@@ -8603,54 +8965,23 @@
               </a:defRPr>
             </a:pPr>
             <a:r>
-              <a:rPr lang="en-US" dirty="0"/>
+              <a:rPr lang="en-US" dirty="0">
+                <a:latin typeface="微软雅黑" panose="020B0503020204020204" pitchFamily="34" charset="-122"/>
+                <a:ea typeface="微软雅黑" panose="020B0503020204020204" pitchFamily="34" charset="-122"/>
+              </a:rPr>
               <a:t>          </a:t>
             </a:r>
             <a:r>
-              <a:rPr dirty="0" err="1"/>
+              <a:rPr dirty="0" err="1">
+                <a:latin typeface="微软雅黑" panose="020B0503020204020204" pitchFamily="34" charset="-122"/>
+                <a:ea typeface="微软雅黑" panose="020B0503020204020204" pitchFamily="34" charset="-122"/>
+              </a:rPr>
               <a:t>换较快的阶段</a:t>
             </a:r>
-            <a:endParaRPr dirty="0"/>
-          </a:p>
-          <a:p>
-            <a:pPr>
-              <a:spcAft>
-                <a:spcPts val="800"/>
-              </a:spcAft>
-              <a:defRPr sz="1300">
-                <a:solidFill>
-                  <a:srgbClr val="323944"/>
-                </a:solidFill>
-                <a:latin typeface="Microsoft YaHei"/>
-              </a:defRPr>
-            </a:pPr>
-            <a:r>
-              <a:rPr dirty="0" err="1"/>
-              <a:t>特点：对行情拐点敏感，但对噪声和交易成</a:t>
-            </a:r>
-            <a:endParaRPr lang="en-US" dirty="0"/>
-          </a:p>
-          <a:p>
-            <a:pPr>
-              <a:spcAft>
-                <a:spcPts val="800"/>
-              </a:spcAft>
-              <a:defRPr sz="1300">
-                <a:solidFill>
-                  <a:srgbClr val="323944"/>
-                </a:solidFill>
-                <a:latin typeface="Microsoft YaHei"/>
-              </a:defRPr>
-            </a:pPr>
-            <a:r>
-              <a:rPr lang="en-US" dirty="0"/>
-              <a:t>          </a:t>
-            </a:r>
-            <a:r>
-              <a:rPr dirty="0" err="1"/>
-              <a:t>本也更敏感</a:t>
-            </a:r>
-            <a:endParaRPr dirty="0"/>
+            <a:endParaRPr dirty="0">
+              <a:latin typeface="微软雅黑" panose="020B0503020204020204" pitchFamily="34" charset="-122"/>
+              <a:ea typeface="微软雅黑" panose="020B0503020204020204" pitchFamily="34" charset="-122"/>
+            </a:endParaRPr>
           </a:p>
         </p:txBody>
       </p:sp>
@@ -8789,7 +9120,7 @@
         <p:spPr>
           <a:xfrm>
             <a:off x="4498848" y="2459736"/>
-            <a:ext cx="3246120" cy="2041585"/>
+            <a:ext cx="3246120" cy="1738938"/>
           </a:xfrm>
           <a:prstGeom prst="rect">
             <a:avLst/>
@@ -8814,10 +9145,16 @@
               </a:defRPr>
             </a:pPr>
             <a:r>
-              <a:rPr dirty="0" err="1"/>
+              <a:rPr dirty="0" err="1">
+                <a:latin typeface="微软雅黑" panose="020B0503020204020204" pitchFamily="34" charset="-122"/>
+                <a:ea typeface="微软雅黑" panose="020B0503020204020204" pitchFamily="34" charset="-122"/>
+              </a:rPr>
               <a:t>分类：产业基本面因子、宏观因子</a:t>
             </a:r>
-            <a:endParaRPr dirty="0"/>
+            <a:endParaRPr dirty="0">
+              <a:latin typeface="微软雅黑" panose="020B0503020204020204" pitchFamily="34" charset="-122"/>
+              <a:ea typeface="微软雅黑" panose="020B0503020204020204" pitchFamily="34" charset="-122"/>
+            </a:endParaRPr>
           </a:p>
           <a:p>
             <a:pPr>
@@ -8832,11 +9169,17 @@
               </a:defRPr>
             </a:pPr>
             <a:r>
-              <a:rPr dirty="0" err="1"/>
+              <a:rPr dirty="0" err="1">
+                <a:latin typeface="微软雅黑" panose="020B0503020204020204" pitchFamily="34" charset="-122"/>
+                <a:ea typeface="微软雅黑" panose="020B0503020204020204" pitchFamily="34" charset="-122"/>
+              </a:rPr>
               <a:t>示例</a:t>
             </a:r>
             <a:r>
-              <a:rPr dirty="0"/>
+              <a:rPr dirty="0">
+                <a:latin typeface="微软雅黑" panose="020B0503020204020204" pitchFamily="34" charset="-122"/>
+                <a:ea typeface="微软雅黑" panose="020B0503020204020204" pitchFamily="34" charset="-122"/>
+              </a:rPr>
               <a:t>：</a:t>
             </a:r>
             <a:r>
@@ -8844,7 +9187,21 @@
                 <a:latin typeface="微软雅黑" panose="020B0503020204020204" pitchFamily="34" charset="-122"/>
                 <a:ea typeface="微软雅黑" panose="020B0503020204020204" pitchFamily="34" charset="-122"/>
               </a:rPr>
-              <a:t>库存策略、期限结构、宏观策略</a:t>
+              <a:t>库存策略、</a:t>
+            </a:r>
+            <a:r>
+              <a:rPr lang="en-US" altLang="zh-CN" dirty="0">
+                <a:latin typeface="微软雅黑" panose="020B0503020204020204" pitchFamily="34" charset="-122"/>
+                <a:ea typeface="微软雅黑" panose="020B0503020204020204" pitchFamily="34" charset="-122"/>
+              </a:rPr>
+              <a:t>Carry</a:t>
+            </a:r>
+            <a:r>
+              <a:rPr lang="zh-CN" altLang="en-US" dirty="0">
+                <a:latin typeface="微软雅黑" panose="020B0503020204020204" pitchFamily="34" charset="-122"/>
+                <a:ea typeface="微软雅黑" panose="020B0503020204020204" pitchFamily="34" charset="-122"/>
+              </a:rPr>
+              <a:t>、宏观策略</a:t>
             </a:r>
             <a:endParaRPr dirty="0">
               <a:latin typeface="微软雅黑" panose="020B0503020204020204" pitchFamily="34" charset="-122"/>
@@ -8864,10 +9221,16 @@
               </a:defRPr>
             </a:pPr>
             <a:r>
-              <a:rPr dirty="0" err="1"/>
+              <a:rPr dirty="0" err="1">
+                <a:latin typeface="微软雅黑" panose="020B0503020204020204" pitchFamily="34" charset="-122"/>
+                <a:ea typeface="微软雅黑" panose="020B0503020204020204" pitchFamily="34" charset="-122"/>
+              </a:rPr>
               <a:t>优点：经济含义清晰、跨周期解释力强、稳</a:t>
             </a:r>
-            <a:endParaRPr lang="en-US" dirty="0"/>
+            <a:endParaRPr lang="en-US" dirty="0">
+              <a:latin typeface="微软雅黑" panose="020B0503020204020204" pitchFamily="34" charset="-122"/>
+              <a:ea typeface="微软雅黑" panose="020B0503020204020204" pitchFamily="34" charset="-122"/>
+            </a:endParaRPr>
           </a:p>
           <a:p>
             <a:pPr>
@@ -8882,14 +9245,23 @@
               </a:defRPr>
             </a:pPr>
             <a:r>
-              <a:rPr lang="en-US" dirty="0"/>
+              <a:rPr lang="en-US" dirty="0">
+                <a:latin typeface="微软雅黑" panose="020B0503020204020204" pitchFamily="34" charset="-122"/>
+                <a:ea typeface="微软雅黑" panose="020B0503020204020204" pitchFamily="34" charset="-122"/>
+              </a:rPr>
               <a:t>          </a:t>
             </a:r>
             <a:r>
-              <a:rPr dirty="0" err="1"/>
+              <a:rPr dirty="0" err="1">
+                <a:latin typeface="微软雅黑" panose="020B0503020204020204" pitchFamily="34" charset="-122"/>
+                <a:ea typeface="微软雅黑" panose="020B0503020204020204" pitchFamily="34" charset="-122"/>
+              </a:rPr>
               <a:t>定性较好</a:t>
             </a:r>
-            <a:endParaRPr dirty="0"/>
+            <a:endParaRPr dirty="0">
+              <a:latin typeface="微软雅黑" panose="020B0503020204020204" pitchFamily="34" charset="-122"/>
+              <a:ea typeface="微软雅黑" panose="020B0503020204020204" pitchFamily="34" charset="-122"/>
+            </a:endParaRPr>
           </a:p>
           <a:p>
             <a:pPr>
@@ -8904,15 +9276,11 @@
               </a:defRPr>
             </a:pPr>
             <a:r>
-              <a:rPr dirty="0" err="1"/>
-              <a:t>适配：</a:t>
-            </a:r>
-            <a:r>
               <a:rPr dirty="0" err="1">
                 <a:latin typeface="微软雅黑" panose="020B0503020204020204" pitchFamily="34" charset="-122"/>
                 <a:ea typeface="微软雅黑" panose="020B0503020204020204" pitchFamily="34" charset="-122"/>
               </a:rPr>
-              <a:t>适合</a:t>
+              <a:t>适配：适合</a:t>
             </a:r>
             <a:r>
               <a:rPr lang="zh-CN" altLang="en-US" dirty="0">
@@ -8967,41 +9335,6 @@
               <a:t>强弱配置</a:t>
             </a:r>
             <a:endParaRPr lang="en-US" dirty="0">
-              <a:latin typeface="微软雅黑" panose="020B0503020204020204" pitchFamily="34" charset="-122"/>
-              <a:ea typeface="微软雅黑" panose="020B0503020204020204" pitchFamily="34" charset="-122"/>
-            </a:endParaRPr>
-          </a:p>
-          <a:p>
-            <a:pPr>
-              <a:spcAft>
-                <a:spcPts val="800"/>
-              </a:spcAft>
-              <a:defRPr sz="1300">
-                <a:solidFill>
-                  <a:srgbClr val="323944"/>
-                </a:solidFill>
-                <a:latin typeface="Microsoft YaHei"/>
-              </a:defRPr>
-            </a:pPr>
-            <a:r>
-              <a:rPr dirty="0" err="1"/>
-              <a:t>特点：更新频率相对较低</a:t>
-            </a:r>
-            <a:r>
-              <a:rPr dirty="0">
-                <a:latin typeface="微软雅黑" panose="020B0503020204020204" pitchFamily="34" charset="-122"/>
-                <a:ea typeface="微软雅黑" panose="020B0503020204020204" pitchFamily="34" charset="-122"/>
-              </a:rPr>
-              <a:t>，</a:t>
-            </a:r>
-            <a:r>
-              <a:rPr lang="zh-CN" altLang="en-US" dirty="0">
-                <a:latin typeface="微软雅黑" panose="020B0503020204020204" pitchFamily="34" charset="-122"/>
-                <a:ea typeface="微软雅黑" panose="020B0503020204020204" pitchFamily="34" charset="-122"/>
-              </a:rPr>
-              <a:t>数据质量不稳定</a:t>
-            </a:r>
-            <a:endParaRPr dirty="0">
               <a:latin typeface="微软雅黑" panose="020B0503020204020204" pitchFamily="34" charset="-122"/>
               <a:ea typeface="微软雅黑" panose="020B0503020204020204" pitchFamily="34" charset="-122"/>
             </a:endParaRPr>
@@ -9143,7 +9476,7 @@
         <p:spPr>
           <a:xfrm>
             <a:off x="8202168" y="2459736"/>
-            <a:ext cx="3246120" cy="1738938"/>
+            <a:ext cx="3246120" cy="1436291"/>
           </a:xfrm>
           <a:prstGeom prst="rect">
             <a:avLst/>
@@ -9168,10 +9501,16 @@
               </a:defRPr>
             </a:pPr>
             <a:r>
-              <a:rPr dirty="0" err="1"/>
+              <a:rPr dirty="0" err="1">
+                <a:latin typeface="微软雅黑" panose="020B0503020204020204" pitchFamily="34" charset="-122"/>
+                <a:ea typeface="微软雅黑" panose="020B0503020204020204" pitchFamily="34" charset="-122"/>
+              </a:rPr>
               <a:t>分类：事件驱动类、替代数据类、预期类</a:t>
             </a:r>
-            <a:endParaRPr dirty="0"/>
+            <a:endParaRPr dirty="0">
+              <a:latin typeface="微软雅黑" panose="020B0503020204020204" pitchFamily="34" charset="-122"/>
+              <a:ea typeface="微软雅黑" panose="020B0503020204020204" pitchFamily="34" charset="-122"/>
+            </a:endParaRPr>
           </a:p>
           <a:p>
             <a:pPr>
@@ -9275,59 +9614,11 @@
               </a:defRPr>
             </a:pPr>
             <a:r>
-              <a:rPr dirty="0" err="1"/>
+              <a:rPr dirty="0" err="1">
+                <a:latin typeface="微软雅黑" panose="020B0503020204020204" pitchFamily="34" charset="-122"/>
+                <a:ea typeface="微软雅黑" panose="020B0503020204020204" pitchFamily="34" charset="-122"/>
+              </a:rPr>
               <a:t>适配：适合突发事件驱动或常规信号拥挤</a:t>
-            </a:r>
-            <a:endParaRPr dirty="0"/>
-          </a:p>
-          <a:p>
-            <a:pPr>
-              <a:spcAft>
-                <a:spcPts val="800"/>
-              </a:spcAft>
-              <a:defRPr sz="1300">
-                <a:solidFill>
-                  <a:srgbClr val="323944"/>
-                </a:solidFill>
-                <a:latin typeface="Microsoft YaHei"/>
-              </a:defRPr>
-            </a:pPr>
-            <a:r>
-              <a:rPr dirty="0" err="1"/>
-              <a:t>特点</a:t>
-            </a:r>
-            <a:r>
-              <a:rPr dirty="0"/>
-              <a:t>：</a:t>
-            </a:r>
-            <a:r>
-              <a:rPr lang="en-US" dirty="0"/>
-              <a:t> </a:t>
-            </a:r>
-            <a:r>
-              <a:rPr dirty="0" err="1"/>
-              <a:t>噪声较高</a:t>
-            </a:r>
-            <a:r>
-              <a:rPr dirty="0" err="1">
-                <a:latin typeface="微软雅黑" panose="020B0503020204020204" pitchFamily="34" charset="-122"/>
-                <a:ea typeface="微软雅黑" panose="020B0503020204020204" pitchFamily="34" charset="-122"/>
-              </a:rPr>
-              <a:t>，需</a:t>
-            </a:r>
-            <a:r>
-              <a:rPr lang="zh-CN" altLang="en-US" dirty="0">
-                <a:latin typeface="微软雅黑" panose="020B0503020204020204" pitchFamily="34" charset="-122"/>
-                <a:ea typeface="微软雅黑" panose="020B0503020204020204" pitchFamily="34" charset="-122"/>
-              </a:rPr>
-              <a:t>大量</a:t>
-            </a:r>
-            <a:r>
-              <a:rPr dirty="0" err="1">
-                <a:latin typeface="微软雅黑" panose="020B0503020204020204" pitchFamily="34" charset="-122"/>
-                <a:ea typeface="微软雅黑" panose="020B0503020204020204" pitchFamily="34" charset="-122"/>
-              </a:rPr>
-              <a:t>清洗和验证</a:t>
             </a:r>
             <a:endParaRPr dirty="0">
               <a:latin typeface="微软雅黑" panose="020B0503020204020204" pitchFamily="34" charset="-122"/>

--- a/CTA投研框架.pptx
+++ b/CTA投研框架.pptx
@@ -2684,7 +2684,7 @@
           <a:p>
             <a:fld id="{8AA9E099-52E9-4CD3-93E5-25DC0878765A}" type="slidenum">
               <a:rPr lang="zh-CN" altLang="en-US" smtClean="0"/>
-              <a:t>9</a:t>
+              <a:t>6</a:t>
             </a:fld>
             <a:endParaRPr lang="zh-CN" altLang="en-US"/>
           </a:p>
@@ -2693,7 +2693,7 @@
     </p:spTree>
     <p:extLst>
       <p:ext uri="{BB962C8B-B14F-4D97-AF65-F5344CB8AC3E}">
-        <p14:creationId xmlns:p14="http://schemas.microsoft.com/office/powerpoint/2010/main" val="2827194165"/>
+        <p14:creationId xmlns:p14="http://schemas.microsoft.com/office/powerpoint/2010/main" val="822019953"/>
       </p:ext>
     </p:extLst>
   </p:cSld>
@@ -2768,6 +2768,174 @@
           <a:p>
             <a:fld id="{8AA9E099-52E9-4CD3-93E5-25DC0878765A}" type="slidenum">
               <a:rPr lang="zh-CN" altLang="en-US" smtClean="0"/>
+              <a:t>8</a:t>
+            </a:fld>
+            <a:endParaRPr lang="zh-CN" altLang="en-US"/>
+          </a:p>
+        </p:txBody>
+      </p:sp>
+    </p:spTree>
+    <p:extLst>
+      <p:ext uri="{BB962C8B-B14F-4D97-AF65-F5344CB8AC3E}">
+        <p14:creationId xmlns:p14="http://schemas.microsoft.com/office/powerpoint/2010/main" val="1130503744"/>
+      </p:ext>
+    </p:extLst>
+  </p:cSld>
+  <p:clrMapOvr>
+    <a:masterClrMapping/>
+  </p:clrMapOvr>
+</p:notes>
+</file>
+
+<file path=ppt/notesSlides/notesSlide7.xml><?xml version="1.0" encoding="utf-8"?>
+<p:notes xmlns:a="http://schemas.openxmlformats.org/drawingml/2006/main" xmlns:r="http://schemas.openxmlformats.org/officeDocument/2006/relationships" xmlns:p="http://schemas.openxmlformats.org/presentationml/2006/main">
+  <p:cSld>
+    <p:spTree>
+      <p:nvGrpSpPr>
+        <p:cNvPr id="1" name=""/>
+        <p:cNvGrpSpPr/>
+        <p:nvPr/>
+      </p:nvGrpSpPr>
+      <p:grpSpPr>
+        <a:xfrm>
+          <a:off x="0" y="0"/>
+          <a:ext cx="0" cy="0"/>
+          <a:chOff x="0" y="0"/>
+          <a:chExt cx="0" cy="0"/>
+        </a:xfrm>
+      </p:grpSpPr>
+      <p:sp>
+        <p:nvSpPr>
+          <p:cNvPr id="2" name="幻灯片图像占位符 1"/>
+          <p:cNvSpPr>
+            <a:spLocks noGrp="1" noRot="1" noChangeAspect="1"/>
+          </p:cNvSpPr>
+          <p:nvPr>
+            <p:ph type="sldImg"/>
+          </p:nvPr>
+        </p:nvSpPr>
+        <p:spPr/>
+      </p:sp>
+      <p:sp>
+        <p:nvSpPr>
+          <p:cNvPr id="3" name="备注占位符 2"/>
+          <p:cNvSpPr>
+            <a:spLocks noGrp="1"/>
+          </p:cNvSpPr>
+          <p:nvPr>
+            <p:ph type="body" idx="1"/>
+          </p:nvPr>
+        </p:nvSpPr>
+        <p:spPr/>
+        <p:txBody>
+          <a:bodyPr/>
+          <a:lstStyle/>
+          <a:p>
+            <a:endParaRPr lang="zh-CN" altLang="en-US" dirty="0"/>
+          </a:p>
+        </p:txBody>
+      </p:sp>
+      <p:sp>
+        <p:nvSpPr>
+          <p:cNvPr id="4" name="灯片编号占位符 3"/>
+          <p:cNvSpPr>
+            <a:spLocks noGrp="1"/>
+          </p:cNvSpPr>
+          <p:nvPr>
+            <p:ph type="sldNum" sz="quarter" idx="5"/>
+          </p:nvPr>
+        </p:nvSpPr>
+        <p:spPr/>
+        <p:txBody>
+          <a:bodyPr/>
+          <a:lstStyle/>
+          <a:p>
+            <a:fld id="{8AA9E099-52E9-4CD3-93E5-25DC0878765A}" type="slidenum">
+              <a:rPr lang="zh-CN" altLang="en-US" smtClean="0"/>
+              <a:t>9</a:t>
+            </a:fld>
+            <a:endParaRPr lang="zh-CN" altLang="en-US"/>
+          </a:p>
+        </p:txBody>
+      </p:sp>
+    </p:spTree>
+    <p:extLst>
+      <p:ext uri="{BB962C8B-B14F-4D97-AF65-F5344CB8AC3E}">
+        <p14:creationId xmlns:p14="http://schemas.microsoft.com/office/powerpoint/2010/main" val="2827194165"/>
+      </p:ext>
+    </p:extLst>
+  </p:cSld>
+  <p:clrMapOvr>
+    <a:masterClrMapping/>
+  </p:clrMapOvr>
+</p:notes>
+</file>
+
+<file path=ppt/notesSlides/notesSlide8.xml><?xml version="1.0" encoding="utf-8"?>
+<p:notes xmlns:a="http://schemas.openxmlformats.org/drawingml/2006/main" xmlns:r="http://schemas.openxmlformats.org/officeDocument/2006/relationships" xmlns:p="http://schemas.openxmlformats.org/presentationml/2006/main">
+  <p:cSld>
+    <p:spTree>
+      <p:nvGrpSpPr>
+        <p:cNvPr id="1" name=""/>
+        <p:cNvGrpSpPr/>
+        <p:nvPr/>
+      </p:nvGrpSpPr>
+      <p:grpSpPr>
+        <a:xfrm>
+          <a:off x="0" y="0"/>
+          <a:ext cx="0" cy="0"/>
+          <a:chOff x="0" y="0"/>
+          <a:chExt cx="0" cy="0"/>
+        </a:xfrm>
+      </p:grpSpPr>
+      <p:sp>
+        <p:nvSpPr>
+          <p:cNvPr id="2" name="幻灯片图像占位符 1"/>
+          <p:cNvSpPr>
+            <a:spLocks noGrp="1" noRot="1" noChangeAspect="1"/>
+          </p:cNvSpPr>
+          <p:nvPr>
+            <p:ph type="sldImg"/>
+          </p:nvPr>
+        </p:nvSpPr>
+        <p:spPr/>
+      </p:sp>
+      <p:sp>
+        <p:nvSpPr>
+          <p:cNvPr id="3" name="备注占位符 2"/>
+          <p:cNvSpPr>
+            <a:spLocks noGrp="1"/>
+          </p:cNvSpPr>
+          <p:nvPr>
+            <p:ph type="body" idx="1"/>
+          </p:nvPr>
+        </p:nvSpPr>
+        <p:spPr/>
+        <p:txBody>
+          <a:bodyPr/>
+          <a:lstStyle/>
+          <a:p>
+            <a:endParaRPr lang="zh-CN" altLang="en-US" dirty="0"/>
+          </a:p>
+        </p:txBody>
+      </p:sp>
+      <p:sp>
+        <p:nvSpPr>
+          <p:cNvPr id="4" name="灯片编号占位符 3"/>
+          <p:cNvSpPr>
+            <a:spLocks noGrp="1"/>
+          </p:cNvSpPr>
+          <p:nvPr>
+            <p:ph type="sldNum" sz="quarter" idx="5"/>
+          </p:nvPr>
+        </p:nvSpPr>
+        <p:spPr/>
+        <p:txBody>
+          <a:bodyPr/>
+          <a:lstStyle/>
+          <a:p>
+            <a:fld id="{8AA9E099-52E9-4CD3-93E5-25DC0878765A}" type="slidenum">
+              <a:rPr lang="zh-CN" altLang="en-US" smtClean="0"/>
               <a:t>10</a:t>
             </a:fld>
             <a:endParaRPr lang="zh-CN" altLang="en-US"/>
@@ -2787,7 +2955,7 @@
 </p:notes>
 </file>
 
-<file path=ppt/notesSlides/notesSlide7.xml><?xml version="1.0" encoding="utf-8"?>
+<file path=ppt/notesSlides/notesSlide9.xml><?xml version="1.0" encoding="utf-8"?>
 <p:notes xmlns:a="http://schemas.openxmlformats.org/drawingml/2006/main" xmlns:r="http://schemas.openxmlformats.org/officeDocument/2006/relationships" xmlns:p="http://schemas.openxmlformats.org/presentationml/2006/main">
   <p:cSld>
     <p:spTree>
@@ -11338,7 +11506,7 @@
                 <a:latin typeface="Microsoft YaHei" panose="020B0503020204020204" pitchFamily="34" charset="-122"/>
                 <a:ea typeface="Microsoft YaHei" panose="020B0503020204020204" pitchFamily="34" charset="-122"/>
               </a:rPr>
-              <a:t>适配：突发事件驱动或常规信号拥挤阶段</a:t>
+              <a:t>适配：事件驱动或常规因子拥挤</a:t>
             </a:r>
             <a:endParaRPr dirty="0">
               <a:latin typeface="Microsoft YaHei" panose="020B0503020204020204" pitchFamily="34" charset="-122"/>
@@ -12319,7 +12487,7 @@
         </p:xfrm>
         <a:graphic>
           <a:graphicData uri="http://schemas.openxmlformats.org/drawingml/2006/chart">
-            <c:chart xmlns:c="http://schemas.openxmlformats.org/drawingml/2006/chart" xmlns:r="http://schemas.openxmlformats.org/officeDocument/2006/relationships" r:id="rId2"/>
+            <c:chart xmlns:c="http://schemas.openxmlformats.org/drawingml/2006/chart" xmlns:r="http://schemas.openxmlformats.org/officeDocument/2006/relationships" r:id="rId3"/>
           </a:graphicData>
         </a:graphic>
       </p:graphicFrame>
@@ -12404,8 +12572,8 @@
         </p:nvSpPr>
         <p:spPr>
           <a:xfrm>
-            <a:off x="4241507" y="3727196"/>
-            <a:ext cx="3724225" cy="292388"/>
+            <a:off x="4173733" y="3727196"/>
+            <a:ext cx="3859775" cy="292388"/>
           </a:xfrm>
           <a:prstGeom prst="rect">
             <a:avLst/>
@@ -12420,12 +12588,86 @@
           <a:p>
             <a:pPr algn="ctr"/>
             <a:r>
-              <a:rPr sz="1300">
-                <a:latin typeface="Microsoft YaHei" panose="020B0503020204020204" pitchFamily="34" charset="-122"/>
-                <a:ea typeface="Microsoft YaHei" panose="020B0503020204020204" pitchFamily="34" charset="-122"/>
-              </a:rPr>
-              <a:t>因子收益率_t = α + β · Portfolio收益率_t + ε_t</a:t>
-            </a:r>
+              <a:rPr sz="1300" dirty="0" err="1">
+                <a:latin typeface="Microsoft YaHei" panose="020B0503020204020204" pitchFamily="34" charset="-122"/>
+                <a:ea typeface="Microsoft YaHei" panose="020B0503020204020204" pitchFamily="34" charset="-122"/>
+              </a:rPr>
+              <a:t>因子收益率_</a:t>
+            </a:r>
+            <a:r>
+              <a:rPr lang="en-US" sz="1300" dirty="0" err="1">
+                <a:latin typeface="Microsoft YaHei" panose="020B0503020204020204" pitchFamily="34" charset="-122"/>
+                <a:ea typeface="Microsoft YaHei" panose="020B0503020204020204" pitchFamily="34" charset="-122"/>
+              </a:rPr>
+              <a:t>re</a:t>
+            </a:r>
+            <a:r>
+              <a:rPr sz="1300" dirty="0" err="1">
+                <a:latin typeface="Microsoft YaHei" panose="020B0503020204020204" pitchFamily="34" charset="-122"/>
+                <a:ea typeface="Microsoft YaHei" panose="020B0503020204020204" pitchFamily="34" charset="-122"/>
+              </a:rPr>
+              <a:t>t</a:t>
+            </a:r>
+            <a:r>
+              <a:rPr sz="1300" dirty="0">
+                <a:latin typeface="Microsoft YaHei" panose="020B0503020204020204" pitchFamily="34" charset="-122"/>
+                <a:ea typeface="Microsoft YaHei" panose="020B0503020204020204" pitchFamily="34" charset="-122"/>
+              </a:rPr>
+              <a:t> = β · </a:t>
+            </a:r>
+            <a:r>
+              <a:rPr sz="1300" dirty="0" err="1">
+                <a:latin typeface="Microsoft YaHei" panose="020B0503020204020204" pitchFamily="34" charset="-122"/>
+                <a:ea typeface="Microsoft YaHei" panose="020B0503020204020204" pitchFamily="34" charset="-122"/>
+              </a:rPr>
+              <a:t>Portfolio收益率_</a:t>
+            </a:r>
+            <a:r>
+              <a:rPr lang="en-US" sz="1300" dirty="0" err="1">
+                <a:latin typeface="Microsoft YaHei" panose="020B0503020204020204" pitchFamily="34" charset="-122"/>
+                <a:ea typeface="Microsoft YaHei" panose="020B0503020204020204" pitchFamily="34" charset="-122"/>
+              </a:rPr>
+              <a:t>re</a:t>
+            </a:r>
+            <a:r>
+              <a:rPr sz="1300" dirty="0" err="1">
+                <a:latin typeface="Microsoft YaHei" panose="020B0503020204020204" pitchFamily="34" charset="-122"/>
+                <a:ea typeface="Microsoft YaHei" panose="020B0503020204020204" pitchFamily="34" charset="-122"/>
+              </a:rPr>
+              <a:t>t</a:t>
+            </a:r>
+            <a:r>
+              <a:rPr sz="1300" dirty="0">
+                <a:latin typeface="Microsoft YaHei" panose="020B0503020204020204" pitchFamily="34" charset="-122"/>
+                <a:ea typeface="Microsoft YaHei" panose="020B0503020204020204" pitchFamily="34" charset="-122"/>
+              </a:rPr>
+              <a:t> + </a:t>
+            </a:r>
+            <a:r>
+              <a:rPr sz="1300" dirty="0" err="1">
+                <a:latin typeface="Microsoft YaHei" panose="020B0503020204020204" pitchFamily="34" charset="-122"/>
+                <a:ea typeface="Microsoft YaHei" panose="020B0503020204020204" pitchFamily="34" charset="-122"/>
+              </a:rPr>
+              <a:t>ε_</a:t>
+            </a:r>
+            <a:r>
+              <a:rPr lang="en-US" sz="1300" dirty="0" err="1">
+                <a:latin typeface="Microsoft YaHei" panose="020B0503020204020204" pitchFamily="34" charset="-122"/>
+                <a:ea typeface="Microsoft YaHei" panose="020B0503020204020204" pitchFamily="34" charset="-122"/>
+              </a:rPr>
+              <a:t>re</a:t>
+            </a:r>
+            <a:r>
+              <a:rPr sz="1300" dirty="0" err="1">
+                <a:latin typeface="Microsoft YaHei" panose="020B0503020204020204" pitchFamily="34" charset="-122"/>
+                <a:ea typeface="Microsoft YaHei" panose="020B0503020204020204" pitchFamily="34" charset="-122"/>
+              </a:rPr>
+              <a:t>t</a:t>
+            </a:r>
+            <a:endParaRPr sz="1300" dirty="0">
+              <a:latin typeface="Microsoft YaHei" panose="020B0503020204020204" pitchFamily="34" charset="-122"/>
+              <a:ea typeface="Microsoft YaHei" panose="020B0503020204020204" pitchFamily="34" charset="-122"/>
+            </a:endParaRPr>
           </a:p>
         </p:txBody>
       </p:sp>
@@ -12476,7 +12718,7 @@
         </p:xfrm>
         <a:graphic>
           <a:graphicData uri="http://schemas.openxmlformats.org/drawingml/2006/chart">
-            <c:chart xmlns:c="http://schemas.openxmlformats.org/drawingml/2006/chart" xmlns:r="http://schemas.openxmlformats.org/officeDocument/2006/relationships" r:id="rId3"/>
+            <c:chart xmlns:c="http://schemas.openxmlformats.org/drawingml/2006/chart" xmlns:r="http://schemas.openxmlformats.org/officeDocument/2006/relationships" r:id="rId4"/>
           </a:graphicData>
         </a:graphic>
       </p:graphicFrame>
@@ -13707,7 +13949,7 @@
               </a:defRPr>
             </a:pPr>
             <a:r>
-              <a:rPr lang="en-US" altLang="zh-CN">
+              <a:rPr lang="en-US" altLang="zh-CN" dirty="0" err="1">
                 <a:solidFill>
                   <a:srgbClr val="475569"/>
                 </a:solidFill>
@@ -13717,14 +13959,14 @@
               <a:t>VaR</a:t>
             </a:r>
             <a:r>
-              <a:rPr lang="zh-CN" altLang="en-US">
+              <a:rPr lang="zh-CN" altLang="en-US" dirty="0">
                 <a:solidFill>
                   <a:srgbClr val="475569"/>
                 </a:solidFill>
                 <a:latin typeface="Microsoft YaHei" panose="020B0503020204020204" pitchFamily="34" charset="-122"/>
                 <a:ea typeface="Microsoft YaHei" panose="020B0503020204020204" pitchFamily="34" charset="-122"/>
               </a:rPr>
-              <a:t>约束：在既定置信水平与持有期下控制潜在最大损失。</a:t>
+              <a:t>约束：在既定置信水平与持有期下控制潜在最大损失</a:t>
             </a:r>
           </a:p>
           <a:p>
@@ -13740,14 +13982,14 @@
               </a:defRPr>
             </a:pPr>
             <a:r>
-              <a:rPr lang="zh-CN" altLang="en-US">
+              <a:rPr lang="zh-CN" altLang="en-US" dirty="0">
                 <a:solidFill>
                   <a:srgbClr val="475569"/>
                 </a:solidFill>
                 <a:latin typeface="Microsoft YaHei" panose="020B0503020204020204" pitchFamily="34" charset="-122"/>
                 <a:ea typeface="Microsoft YaHei" panose="020B0503020204020204" pitchFamily="34" charset="-122"/>
               </a:rPr>
-              <a:t>投资限制：对开仓、杠杆比例与总仓位设置上限。</a:t>
+              <a:t>投资限制：对开仓、杠杆比例与总仓位设置上限</a:t>
             </a:r>
           </a:p>
           <a:p>
@@ -13763,7 +14005,7 @@
               </a:defRPr>
             </a:pPr>
             <a:r>
-              <a:rPr lang="zh-CN" altLang="en-US">
+              <a:rPr lang="zh-CN" altLang="en-US" dirty="0">
                 <a:solidFill>
                   <a:srgbClr val="475569"/>
                 </a:solidFill>
@@ -13773,7 +14015,7 @@
               <a:t>集中度限制：单品种</a:t>
             </a:r>
             <a:r>
-              <a:rPr lang="en-US" altLang="zh-CN">
+              <a:rPr lang="en-US" altLang="zh-CN" dirty="0">
                 <a:solidFill>
                   <a:srgbClr val="475569"/>
                 </a:solidFill>
@@ -13783,14 +14025,14 @@
               <a:t>/</a:t>
             </a:r>
             <a:r>
-              <a:rPr lang="zh-CN" altLang="en-US">
+              <a:rPr lang="zh-CN" altLang="en-US" dirty="0">
                 <a:solidFill>
                   <a:srgbClr val="475569"/>
                 </a:solidFill>
                 <a:latin typeface="Microsoft YaHei" panose="020B0503020204020204" pitchFamily="34" charset="-122"/>
                 <a:ea typeface="Microsoft YaHei" panose="020B0503020204020204" pitchFamily="34" charset="-122"/>
               </a:rPr>
-              <a:t>单板块占比不得超过阈值。</a:t>
+              <a:t>单板块占比不得超过阈值</a:t>
             </a:r>
             <a:endParaRPr dirty="0">
               <a:latin typeface="Microsoft YaHei" panose="020B0503020204020204" pitchFamily="34" charset="-122"/>
@@ -14130,14 +14372,14 @@
               </a:defRPr>
             </a:pPr>
             <a:r>
-              <a:rPr lang="zh-CN" altLang="en-US">
+              <a:rPr lang="zh-CN" altLang="en-US" dirty="0">
                 <a:solidFill>
                   <a:srgbClr val="475569"/>
                 </a:solidFill>
                 <a:latin typeface="Microsoft YaHei" panose="020B0503020204020204" pitchFamily="34" charset="-122"/>
                 <a:ea typeface="Microsoft YaHei" panose="020B0503020204020204" pitchFamily="34" charset="-122"/>
               </a:rPr>
-              <a:t>第一层：节假日前后，按流动性与跳空风险调整仓位。</a:t>
+              <a:t>第一层：节假日前后，按流动性与跳空风险调整仓位</a:t>
             </a:r>
           </a:p>
           <a:p>
@@ -14153,14 +14395,14 @@
               </a:defRPr>
             </a:pPr>
             <a:r>
-              <a:rPr lang="zh-CN" altLang="en-US">
+              <a:rPr lang="zh-CN" altLang="en-US" dirty="0">
                 <a:solidFill>
                   <a:srgbClr val="475569"/>
                 </a:solidFill>
                 <a:latin typeface="Microsoft YaHei" panose="020B0503020204020204" pitchFamily="34" charset="-122"/>
                 <a:ea typeface="Microsoft YaHei" panose="020B0503020204020204" pitchFamily="34" charset="-122"/>
               </a:rPr>
-              <a:t>第二层：触发预警线、止损线后，自动下调组合仓位。</a:t>
+              <a:t>第二层：触发预警线、止损线后，自动下调组合仓位</a:t>
             </a:r>
           </a:p>
           <a:p>
@@ -14176,14 +14418,14 @@
               </a:defRPr>
             </a:pPr>
             <a:r>
-              <a:rPr lang="zh-CN" altLang="en-US">
+              <a:rPr lang="zh-CN" altLang="en-US" dirty="0">
                 <a:solidFill>
                   <a:srgbClr val="475569"/>
                 </a:solidFill>
                 <a:latin typeface="Microsoft YaHei" panose="020B0503020204020204" pitchFamily="34" charset="-122"/>
                 <a:ea typeface="Microsoft YaHei" panose="020B0503020204020204" pitchFamily="34" charset="-122"/>
               </a:rPr>
-              <a:t>第三层：当某类策略持续回撤时，逐步下调该策略仓位。</a:t>
+              <a:t>第三层：当某类策略持续回撤时，逐步下调该策略仓位</a:t>
             </a:r>
             <a:endParaRPr lang="en-US" dirty="0">
               <a:latin typeface="Microsoft YaHei" panose="020B0503020204020204" pitchFamily="34" charset="-122"/>
@@ -15487,7 +15729,27 @@
                 <a:latin typeface="Microsoft YaHei" panose="020B0503020204020204" pitchFamily="34" charset="-122"/>
                 <a:ea typeface="Microsoft YaHei" panose="020B0503020204020204" pitchFamily="34" charset="-122"/>
               </a:rPr>
-              <a:t>机器学习</a:t>
+              <a:t>机器学习 </a:t>
+            </a:r>
+            <a:r>
+              <a:rPr lang="en-US" altLang="zh-CN" sz="1600" b="1" dirty="0">
+                <a:solidFill>
+                  <a:srgbClr val="333333"/>
+                </a:solidFill>
+                <a:latin typeface="Microsoft YaHei" panose="020B0503020204020204" pitchFamily="34" charset="-122"/>
+                <a:ea typeface="Microsoft YaHei" panose="020B0503020204020204" pitchFamily="34" charset="-122"/>
+              </a:rPr>
+              <a:t>+ </a:t>
+            </a:r>
+            <a:r>
+              <a:rPr lang="zh-CN" altLang="en-US" sz="1600" b="1" dirty="0">
+                <a:solidFill>
+                  <a:srgbClr val="333333"/>
+                </a:solidFill>
+                <a:latin typeface="Microsoft YaHei" panose="020B0503020204020204" pitchFamily="34" charset="-122"/>
+                <a:ea typeface="Microsoft YaHei" panose="020B0503020204020204" pitchFamily="34" charset="-122"/>
+              </a:rPr>
+              <a:t>期限结构</a:t>
             </a:r>
           </a:p>
         </p:txBody>

--- a/CTA投研框架.pptx
+++ b/CTA投研框架.pptx
@@ -2016,7 +2016,7 @@
           <a:p>
             <a:fld id="{CB528E8B-910F-40E5-8D37-3618A8D98E67}" type="datetimeFigureOut">
               <a:rPr lang="zh-CN" altLang="en-US" smtClean="0"/>
-              <a:t>2026/7/2</a:t>
+              <a:t>2026/7/9</a:t>
             </a:fld>
             <a:endParaRPr lang="zh-CN" altLang="en-US"/>
           </a:p>
@@ -2348,7 +2348,7 @@
           <a:p>
             <a:fld id="{8AA9E099-52E9-4CD3-93E5-25DC0878765A}" type="slidenum">
               <a:rPr lang="zh-CN" altLang="en-US" smtClean="0"/>
-              <a:t>2</a:t>
+              <a:t>1</a:t>
             </a:fld>
             <a:endParaRPr lang="zh-CN" altLang="en-US"/>
           </a:p>
@@ -2357,7 +2357,91 @@
     </p:spTree>
     <p:extLst>
       <p:ext uri="{BB962C8B-B14F-4D97-AF65-F5344CB8AC3E}">
-        <p14:creationId xmlns:p14="http://schemas.microsoft.com/office/powerpoint/2010/main" val="2672784313"/>
+        <p14:creationId xmlns:p14="http://schemas.microsoft.com/office/powerpoint/2010/main" val="3301003294"/>
+      </p:ext>
+    </p:extLst>
+  </p:cSld>
+  <p:clrMapOvr>
+    <a:masterClrMapping/>
+  </p:clrMapOvr>
+</p:notes>
+</file>
+
+<file path=ppt/notesSlides/notesSlide10.xml><?xml version="1.0" encoding="utf-8"?>
+<p:notes xmlns:a="http://schemas.openxmlformats.org/drawingml/2006/main" xmlns:r="http://schemas.openxmlformats.org/officeDocument/2006/relationships" xmlns:p="http://schemas.openxmlformats.org/presentationml/2006/main">
+  <p:cSld>
+    <p:spTree>
+      <p:nvGrpSpPr>
+        <p:cNvPr id="1" name=""/>
+        <p:cNvGrpSpPr/>
+        <p:nvPr/>
+      </p:nvGrpSpPr>
+      <p:grpSpPr>
+        <a:xfrm>
+          <a:off x="0" y="0"/>
+          <a:ext cx="0" cy="0"/>
+          <a:chOff x="0" y="0"/>
+          <a:chExt cx="0" cy="0"/>
+        </a:xfrm>
+      </p:grpSpPr>
+      <p:sp>
+        <p:nvSpPr>
+          <p:cNvPr id="2" name="幻灯片图像占位符 1"/>
+          <p:cNvSpPr>
+            <a:spLocks noGrp="1" noRot="1" noChangeAspect="1"/>
+          </p:cNvSpPr>
+          <p:nvPr>
+            <p:ph type="sldImg"/>
+          </p:nvPr>
+        </p:nvSpPr>
+        <p:spPr/>
+      </p:sp>
+      <p:sp>
+        <p:nvSpPr>
+          <p:cNvPr id="3" name="备注占位符 2"/>
+          <p:cNvSpPr>
+            <a:spLocks noGrp="1"/>
+          </p:cNvSpPr>
+          <p:nvPr>
+            <p:ph type="body" idx="1"/>
+          </p:nvPr>
+        </p:nvSpPr>
+        <p:spPr/>
+        <p:txBody>
+          <a:bodyPr/>
+          <a:lstStyle/>
+          <a:p>
+            <a:endParaRPr lang="zh-CN" altLang="en-US"/>
+          </a:p>
+        </p:txBody>
+      </p:sp>
+      <p:sp>
+        <p:nvSpPr>
+          <p:cNvPr id="4" name="灯片编号占位符 3"/>
+          <p:cNvSpPr>
+            <a:spLocks noGrp="1"/>
+          </p:cNvSpPr>
+          <p:nvPr>
+            <p:ph type="sldNum" sz="quarter" idx="5"/>
+          </p:nvPr>
+        </p:nvSpPr>
+        <p:spPr/>
+        <p:txBody>
+          <a:bodyPr/>
+          <a:lstStyle/>
+          <a:p>
+            <a:fld id="{8AA9E099-52E9-4CD3-93E5-25DC0878765A}" type="slidenum">
+              <a:rPr lang="zh-CN" altLang="en-US" smtClean="0"/>
+              <a:t>11</a:t>
+            </a:fld>
+            <a:endParaRPr lang="zh-CN" altLang="en-US"/>
+          </a:p>
+        </p:txBody>
+      </p:sp>
+    </p:spTree>
+    <p:extLst>
+      <p:ext uri="{BB962C8B-B14F-4D97-AF65-F5344CB8AC3E}">
+        <p14:creationId xmlns:p14="http://schemas.microsoft.com/office/powerpoint/2010/main" val="1397993248"/>
       </p:ext>
     </p:extLst>
   </p:cSld>
@@ -2432,7 +2516,7 @@
           <a:p>
             <a:fld id="{8AA9E099-52E9-4CD3-93E5-25DC0878765A}" type="slidenum">
               <a:rPr lang="zh-CN" altLang="en-US" smtClean="0"/>
-              <a:t>3</a:t>
+              <a:t>2</a:t>
             </a:fld>
             <a:endParaRPr lang="zh-CN" altLang="en-US"/>
           </a:p>
@@ -2441,7 +2525,7 @@
     </p:spTree>
     <p:extLst>
       <p:ext uri="{BB962C8B-B14F-4D97-AF65-F5344CB8AC3E}">
-        <p14:creationId xmlns:p14="http://schemas.microsoft.com/office/powerpoint/2010/main" val="3945746484"/>
+        <p14:creationId xmlns:p14="http://schemas.microsoft.com/office/powerpoint/2010/main" val="2672784313"/>
       </p:ext>
     </p:extLst>
   </p:cSld>
@@ -2516,7 +2600,7 @@
           <a:p>
             <a:fld id="{8AA9E099-52E9-4CD3-93E5-25DC0878765A}" type="slidenum">
               <a:rPr lang="zh-CN" altLang="en-US" smtClean="0"/>
-              <a:t>4</a:t>
+              <a:t>3</a:t>
             </a:fld>
             <a:endParaRPr lang="zh-CN" altLang="en-US"/>
           </a:p>
@@ -2525,7 +2609,7 @@
     </p:spTree>
     <p:extLst>
       <p:ext uri="{BB962C8B-B14F-4D97-AF65-F5344CB8AC3E}">
-        <p14:creationId xmlns:p14="http://schemas.microsoft.com/office/powerpoint/2010/main" val="92235620"/>
+        <p14:creationId xmlns:p14="http://schemas.microsoft.com/office/powerpoint/2010/main" val="3945746484"/>
       </p:ext>
     </p:extLst>
   </p:cSld>
@@ -2600,7 +2684,7 @@
           <a:p>
             <a:fld id="{8AA9E099-52E9-4CD3-93E5-25DC0878765A}" type="slidenum">
               <a:rPr lang="zh-CN" altLang="en-US" smtClean="0"/>
-              <a:t>5</a:t>
+              <a:t>4</a:t>
             </a:fld>
             <a:endParaRPr lang="zh-CN" altLang="en-US"/>
           </a:p>
@@ -2609,7 +2693,7 @@
     </p:spTree>
     <p:extLst>
       <p:ext uri="{BB962C8B-B14F-4D97-AF65-F5344CB8AC3E}">
-        <p14:creationId xmlns:p14="http://schemas.microsoft.com/office/powerpoint/2010/main" val="418367812"/>
+        <p14:creationId xmlns:p14="http://schemas.microsoft.com/office/powerpoint/2010/main" val="92235620"/>
       </p:ext>
     </p:extLst>
   </p:cSld>
@@ -2684,7 +2768,7 @@
           <a:p>
             <a:fld id="{8AA9E099-52E9-4CD3-93E5-25DC0878765A}" type="slidenum">
               <a:rPr lang="zh-CN" altLang="en-US" smtClean="0"/>
-              <a:t>6</a:t>
+              <a:t>5</a:t>
             </a:fld>
             <a:endParaRPr lang="zh-CN" altLang="en-US"/>
           </a:p>
@@ -2693,7 +2777,7 @@
     </p:spTree>
     <p:extLst>
       <p:ext uri="{BB962C8B-B14F-4D97-AF65-F5344CB8AC3E}">
-        <p14:creationId xmlns:p14="http://schemas.microsoft.com/office/powerpoint/2010/main" val="822019953"/>
+        <p14:creationId xmlns:p14="http://schemas.microsoft.com/office/powerpoint/2010/main" val="418367812"/>
       </p:ext>
     </p:extLst>
   </p:cSld>
@@ -2768,7 +2852,7 @@
           <a:p>
             <a:fld id="{8AA9E099-52E9-4CD3-93E5-25DC0878765A}" type="slidenum">
               <a:rPr lang="zh-CN" altLang="en-US" smtClean="0"/>
-              <a:t>8</a:t>
+              <a:t>6</a:t>
             </a:fld>
             <a:endParaRPr lang="zh-CN" altLang="en-US"/>
           </a:p>
@@ -2777,7 +2861,7 @@
     </p:spTree>
     <p:extLst>
       <p:ext uri="{BB962C8B-B14F-4D97-AF65-F5344CB8AC3E}">
-        <p14:creationId xmlns:p14="http://schemas.microsoft.com/office/powerpoint/2010/main" val="1130503744"/>
+        <p14:creationId xmlns:p14="http://schemas.microsoft.com/office/powerpoint/2010/main" val="822019953"/>
       </p:ext>
     </p:extLst>
   </p:cSld>
@@ -2852,7 +2936,7 @@
           <a:p>
             <a:fld id="{8AA9E099-52E9-4CD3-93E5-25DC0878765A}" type="slidenum">
               <a:rPr lang="zh-CN" altLang="en-US" smtClean="0"/>
-              <a:t>9</a:t>
+              <a:t>8</a:t>
             </a:fld>
             <a:endParaRPr lang="zh-CN" altLang="en-US"/>
           </a:p>
@@ -2861,7 +2945,7 @@
     </p:spTree>
     <p:extLst>
       <p:ext uri="{BB962C8B-B14F-4D97-AF65-F5344CB8AC3E}">
-        <p14:creationId xmlns:p14="http://schemas.microsoft.com/office/powerpoint/2010/main" val="2827194165"/>
+        <p14:creationId xmlns:p14="http://schemas.microsoft.com/office/powerpoint/2010/main" val="1130503744"/>
       </p:ext>
     </p:extLst>
   </p:cSld>
@@ -2936,7 +3020,7 @@
           <a:p>
             <a:fld id="{8AA9E099-52E9-4CD3-93E5-25DC0878765A}" type="slidenum">
               <a:rPr lang="zh-CN" altLang="en-US" smtClean="0"/>
-              <a:t>10</a:t>
+              <a:t>9</a:t>
             </a:fld>
             <a:endParaRPr lang="zh-CN" altLang="en-US"/>
           </a:p>
@@ -2945,7 +3029,7 @@
     </p:spTree>
     <p:extLst>
       <p:ext uri="{BB962C8B-B14F-4D97-AF65-F5344CB8AC3E}">
-        <p14:creationId xmlns:p14="http://schemas.microsoft.com/office/powerpoint/2010/main" val="1121706145"/>
+        <p14:creationId xmlns:p14="http://schemas.microsoft.com/office/powerpoint/2010/main" val="2827194165"/>
       </p:ext>
     </p:extLst>
   </p:cSld>
@@ -2999,7 +3083,7 @@
           <a:bodyPr/>
           <a:lstStyle/>
           <a:p>
-            <a:endParaRPr lang="zh-CN" altLang="en-US"/>
+            <a:endParaRPr lang="zh-CN" altLang="en-US" dirty="0"/>
           </a:p>
         </p:txBody>
       </p:sp>
@@ -3020,7 +3104,7 @@
           <a:p>
             <a:fld id="{8AA9E099-52E9-4CD3-93E5-25DC0878765A}" type="slidenum">
               <a:rPr lang="zh-CN" altLang="en-US" smtClean="0"/>
-              <a:t>11</a:t>
+              <a:t>10</a:t>
             </a:fld>
             <a:endParaRPr lang="zh-CN" altLang="en-US"/>
           </a:p>
@@ -3029,7 +3113,7 @@
     </p:spTree>
     <p:extLst>
       <p:ext uri="{BB962C8B-B14F-4D97-AF65-F5344CB8AC3E}">
-        <p14:creationId xmlns:p14="http://schemas.microsoft.com/office/powerpoint/2010/main" val="1397993248"/>
+        <p14:creationId xmlns:p14="http://schemas.microsoft.com/office/powerpoint/2010/main" val="1121706145"/>
       </p:ext>
     </p:extLst>
   </p:cSld>
@@ -3218,7 +3302,7 @@
           <a:p>
             <a:fld id="{5BCAD085-E8A6-8845-BD4E-CB4CCA059FC4}" type="datetimeFigureOut">
               <a:rPr lang="en-US" smtClean="0"/>
-              <a:t>7/2/2026</a:t>
+              <a:t>7/9/2026</a:t>
             </a:fld>
             <a:endParaRPr lang="en-US"/>
           </a:p>
@@ -3386,7 +3470,7 @@
           <a:p>
             <a:fld id="{5BCAD085-E8A6-8845-BD4E-CB4CCA059FC4}" type="datetimeFigureOut">
               <a:rPr lang="en-US" smtClean="0"/>
-              <a:t>7/2/2026</a:t>
+              <a:t>7/9/2026</a:t>
             </a:fld>
             <a:endParaRPr lang="en-US"/>
           </a:p>
@@ -3564,7 +3648,7 @@
           <a:p>
             <a:fld id="{5BCAD085-E8A6-8845-BD4E-CB4CCA059FC4}" type="datetimeFigureOut">
               <a:rPr lang="en-US" smtClean="0"/>
-              <a:t>7/2/2026</a:t>
+              <a:t>7/9/2026</a:t>
             </a:fld>
             <a:endParaRPr lang="en-US"/>
           </a:p>
@@ -3732,7 +3816,7 @@
           <a:p>
             <a:fld id="{5BCAD085-E8A6-8845-BD4E-CB4CCA059FC4}" type="datetimeFigureOut">
               <a:rPr lang="en-US" smtClean="0"/>
-              <a:t>7/2/2026</a:t>
+              <a:t>7/9/2026</a:t>
             </a:fld>
             <a:endParaRPr lang="en-US"/>
           </a:p>
@@ -3977,7 +4061,7 @@
           <a:p>
             <a:fld id="{5BCAD085-E8A6-8845-BD4E-CB4CCA059FC4}" type="datetimeFigureOut">
               <a:rPr lang="en-US" smtClean="0"/>
-              <a:t>7/2/2026</a:t>
+              <a:t>7/9/2026</a:t>
             </a:fld>
             <a:endParaRPr lang="en-US"/>
           </a:p>
@@ -4262,7 +4346,7 @@
           <a:p>
             <a:fld id="{5BCAD085-E8A6-8845-BD4E-CB4CCA059FC4}" type="datetimeFigureOut">
               <a:rPr lang="en-US" smtClean="0"/>
-              <a:t>7/2/2026</a:t>
+              <a:t>7/9/2026</a:t>
             </a:fld>
             <a:endParaRPr lang="en-US"/>
           </a:p>
@@ -4681,7 +4765,7 @@
           <a:p>
             <a:fld id="{5BCAD085-E8A6-8845-BD4E-CB4CCA059FC4}" type="datetimeFigureOut">
               <a:rPr lang="en-US" smtClean="0"/>
-              <a:t>7/2/2026</a:t>
+              <a:t>7/9/2026</a:t>
             </a:fld>
             <a:endParaRPr lang="en-US"/>
           </a:p>
@@ -4798,7 +4882,7 @@
           <a:p>
             <a:fld id="{5BCAD085-E8A6-8845-BD4E-CB4CCA059FC4}" type="datetimeFigureOut">
               <a:rPr lang="en-US" smtClean="0"/>
-              <a:t>7/2/2026</a:t>
+              <a:t>7/9/2026</a:t>
             </a:fld>
             <a:endParaRPr lang="en-US"/>
           </a:p>
@@ -4893,7 +4977,7 @@
           <a:p>
             <a:fld id="{5BCAD085-E8A6-8845-BD4E-CB4CCA059FC4}" type="datetimeFigureOut">
               <a:rPr lang="en-US" smtClean="0"/>
-              <a:t>7/2/2026</a:t>
+              <a:t>7/9/2026</a:t>
             </a:fld>
             <a:endParaRPr lang="en-US"/>
           </a:p>
@@ -5168,7 +5252,7 @@
           <a:p>
             <a:fld id="{5BCAD085-E8A6-8845-BD4E-CB4CCA059FC4}" type="datetimeFigureOut">
               <a:rPr lang="en-US" smtClean="0"/>
-              <a:t>7/2/2026</a:t>
+              <a:t>7/9/2026</a:t>
             </a:fld>
             <a:endParaRPr lang="en-US"/>
           </a:p>
@@ -5420,7 +5504,7 @@
           <a:p>
             <a:fld id="{5BCAD085-E8A6-8845-BD4E-CB4CCA059FC4}" type="datetimeFigureOut">
               <a:rPr lang="en-US" smtClean="0"/>
-              <a:t>7/2/2026</a:t>
+              <a:t>7/9/2026</a:t>
             </a:fld>
             <a:endParaRPr lang="en-US"/>
           </a:p>
@@ -5631,7 +5715,7 @@
           <a:p>
             <a:fld id="{5BCAD085-E8A6-8845-BD4E-CB4CCA059FC4}" type="datetimeFigureOut">
               <a:rPr lang="en-US" smtClean="0"/>
-              <a:t>7/2/2026</a:t>
+              <a:t>7/9/2026</a:t>
             </a:fld>
             <a:endParaRPr lang="en-US"/>
           </a:p>
@@ -8480,15 +8564,22 @@
           <a:p>
             <a:pPr algn="ctr"/>
             <a:r>
-              <a:rPr lang="zh-CN" altLang="en-US" sz="2000" b="1" dirty="0">
+              <a:rPr lang="zh-CN" altLang="en-US" sz="2000" b="1">
                 <a:solidFill>
                   <a:srgbClr val="333333"/>
                 </a:solidFill>
                 <a:latin typeface="Microsoft YaHei" panose="020B0503020204020204" pitchFamily="34" charset="-122"/>
                 <a:ea typeface="Microsoft YaHei" panose="020B0503020204020204" pitchFamily="34" charset="-122"/>
               </a:rPr>
-              <a:t>风险模型</a:t>
-            </a:r>
+              <a:t>风险</a:t>
+            </a:r>
+            <a:endParaRPr lang="zh-CN" altLang="en-US" sz="2000" b="1" dirty="0">
+              <a:solidFill>
+                <a:srgbClr val="333333"/>
+              </a:solidFill>
+              <a:latin typeface="Microsoft YaHei" panose="020B0503020204020204" pitchFamily="34" charset="-122"/>
+              <a:ea typeface="Microsoft YaHei" panose="020B0503020204020204" pitchFamily="34" charset="-122"/>
+            </a:endParaRPr>
           </a:p>
         </p:txBody>
       </p:sp>

--- a/CTA投研框架.pptx
+++ b/CTA投研框架.pptx
@@ -2016,7 +2016,7 @@
           <a:p>
             <a:fld id="{CB528E8B-910F-40E5-8D37-3618A8D98E67}" type="datetimeFigureOut">
               <a:rPr lang="zh-CN" altLang="en-US" smtClean="0"/>
-              <a:t>2026/7/9</a:t>
+              <a:t>2026/8/13</a:t>
             </a:fld>
             <a:endParaRPr lang="zh-CN" altLang="en-US"/>
           </a:p>
@@ -3302,7 +3302,7 @@
           <a:p>
             <a:fld id="{5BCAD085-E8A6-8845-BD4E-CB4CCA059FC4}" type="datetimeFigureOut">
               <a:rPr lang="en-US" smtClean="0"/>
-              <a:t>7/9/2026</a:t>
+              <a:t>8/13/2026</a:t>
             </a:fld>
             <a:endParaRPr lang="en-US"/>
           </a:p>
@@ -3470,7 +3470,7 @@
           <a:p>
             <a:fld id="{5BCAD085-E8A6-8845-BD4E-CB4CCA059FC4}" type="datetimeFigureOut">
               <a:rPr lang="en-US" smtClean="0"/>
-              <a:t>7/9/2026</a:t>
+              <a:t>8/13/2026</a:t>
             </a:fld>
             <a:endParaRPr lang="en-US"/>
           </a:p>
@@ -3648,7 +3648,7 @@
           <a:p>
             <a:fld id="{5BCAD085-E8A6-8845-BD4E-CB4CCA059FC4}" type="datetimeFigureOut">
               <a:rPr lang="en-US" smtClean="0"/>
-              <a:t>7/9/2026</a:t>
+              <a:t>8/13/2026</a:t>
             </a:fld>
             <a:endParaRPr lang="en-US"/>
           </a:p>
@@ -3816,7 +3816,7 @@
           <a:p>
             <a:fld id="{5BCAD085-E8A6-8845-BD4E-CB4CCA059FC4}" type="datetimeFigureOut">
               <a:rPr lang="en-US" smtClean="0"/>
-              <a:t>7/9/2026</a:t>
+              <a:t>8/13/2026</a:t>
             </a:fld>
             <a:endParaRPr lang="en-US"/>
           </a:p>
@@ -4061,7 +4061,7 @@
           <a:p>
             <a:fld id="{5BCAD085-E8A6-8845-BD4E-CB4CCA059FC4}" type="datetimeFigureOut">
               <a:rPr lang="en-US" smtClean="0"/>
-              <a:t>7/9/2026</a:t>
+              <a:t>8/13/2026</a:t>
             </a:fld>
             <a:endParaRPr lang="en-US"/>
           </a:p>
@@ -4346,7 +4346,7 @@
           <a:p>
             <a:fld id="{5BCAD085-E8A6-8845-BD4E-CB4CCA059FC4}" type="datetimeFigureOut">
               <a:rPr lang="en-US" smtClean="0"/>
-              <a:t>7/9/2026</a:t>
+              <a:t>8/13/2026</a:t>
             </a:fld>
             <a:endParaRPr lang="en-US"/>
           </a:p>
@@ -4765,7 +4765,7 @@
           <a:p>
             <a:fld id="{5BCAD085-E8A6-8845-BD4E-CB4CCA059FC4}" type="datetimeFigureOut">
               <a:rPr lang="en-US" smtClean="0"/>
-              <a:t>7/9/2026</a:t>
+              <a:t>8/13/2026</a:t>
             </a:fld>
             <a:endParaRPr lang="en-US"/>
           </a:p>
@@ -4882,7 +4882,7 @@
           <a:p>
             <a:fld id="{5BCAD085-E8A6-8845-BD4E-CB4CCA059FC4}" type="datetimeFigureOut">
               <a:rPr lang="en-US" smtClean="0"/>
-              <a:t>7/9/2026</a:t>
+              <a:t>8/13/2026</a:t>
             </a:fld>
             <a:endParaRPr lang="en-US"/>
           </a:p>
@@ -4977,7 +4977,7 @@
           <a:p>
             <a:fld id="{5BCAD085-E8A6-8845-BD4E-CB4CCA059FC4}" type="datetimeFigureOut">
               <a:rPr lang="en-US" smtClean="0"/>
-              <a:t>7/9/2026</a:t>
+              <a:t>8/13/2026</a:t>
             </a:fld>
             <a:endParaRPr lang="en-US"/>
           </a:p>
@@ -5252,7 +5252,7 @@
           <a:p>
             <a:fld id="{5BCAD085-E8A6-8845-BD4E-CB4CCA059FC4}" type="datetimeFigureOut">
               <a:rPr lang="en-US" smtClean="0"/>
-              <a:t>7/9/2026</a:t>
+              <a:t>8/13/2026</a:t>
             </a:fld>
             <a:endParaRPr lang="en-US"/>
           </a:p>
@@ -5504,7 +5504,7 @@
           <a:p>
             <a:fld id="{5BCAD085-E8A6-8845-BD4E-CB4CCA059FC4}" type="datetimeFigureOut">
               <a:rPr lang="en-US" smtClean="0"/>
-              <a:t>7/9/2026</a:t>
+              <a:t>8/13/2026</a:t>
             </a:fld>
             <a:endParaRPr lang="en-US"/>
           </a:p>
@@ -5715,7 +5715,7 @@
           <a:p>
             <a:fld id="{5BCAD085-E8A6-8845-BD4E-CB4CCA059FC4}" type="datetimeFigureOut">
               <a:rPr lang="en-US" smtClean="0"/>
-              <a:t>7/9/2026</a:t>
+              <a:t>8/13/2026</a:t>
             </a:fld>
             <a:endParaRPr lang="en-US"/>
           </a:p>
@@ -8150,7 +8150,7 @@
                 <a:latin typeface="Microsoft YaHei" panose="020B0503020204020204" pitchFamily="34" charset="-122"/>
                 <a:ea typeface="Microsoft YaHei" panose="020B0503020204020204" pitchFamily="34" charset="-122"/>
               </a:rPr>
-              <a:t>数据库</a:t>
+              <a:t>投研平台</a:t>
             </a:r>
           </a:p>
         </p:txBody>
@@ -8564,22 +8564,15 @@
           <a:p>
             <a:pPr algn="ctr"/>
             <a:r>
-              <a:rPr lang="zh-CN" altLang="en-US" sz="2000" b="1">
+              <a:rPr lang="zh-CN" altLang="en-US" sz="2000" b="1" dirty="0">
                 <a:solidFill>
                   <a:srgbClr val="333333"/>
                 </a:solidFill>
                 <a:latin typeface="Microsoft YaHei" panose="020B0503020204020204" pitchFamily="34" charset="-122"/>
                 <a:ea typeface="Microsoft YaHei" panose="020B0503020204020204" pitchFamily="34" charset="-122"/>
               </a:rPr>
-              <a:t>风险</a:t>
-            </a:r>
-            <a:endParaRPr lang="zh-CN" altLang="en-US" sz="2000" b="1" dirty="0">
-              <a:solidFill>
-                <a:srgbClr val="333333"/>
-              </a:solidFill>
-              <a:latin typeface="Microsoft YaHei" panose="020B0503020204020204" pitchFamily="34" charset="-122"/>
-              <a:ea typeface="Microsoft YaHei" panose="020B0503020204020204" pitchFamily="34" charset="-122"/>
-            </a:endParaRPr>
+              <a:t>风控</a:t>
+            </a:r>
           </a:p>
         </p:txBody>
       </p:sp>
